--- a/CITIXEN_UX_Executive_Deck.pptx
+++ b/CITIXEN_UX_Executive_Deck.pptx
@@ -114,207 +114,6 @@
     </a:lvl9pPr>
   </p:defaultTextStyle>
 </p:presentation>
-</file>
-
-<file path=ppt/charts/chart1.xml><?xml version="1.0" encoding="utf-8"?>
-<c:chartSpace xmlns:c="http://schemas.openxmlformats.org/drawingml/2006/chart" xmlns:a="http://schemas.openxmlformats.org/drawingml/2006/main" xmlns:r="http://schemas.openxmlformats.org/officeDocument/2006/relationships">
-  <c:date1904 val="0"/>
-  <c:roundedCorners val="1"/>
-  <c:chart>
-    <c:autoTitleDeleted val="1"/>
-    <c:plotArea>
-      <c:layout/>
-      <c:doughnutChart>
-        <c:varyColors val="1"/>
-        <c:ser>
-          <c:idx val="0"/>
-          <c:order val="0"/>
-          <c:tx>
-            <c:strRef>
-              <c:f>Sheet1!$B$1</c:f>
-              <c:strCache>
-                <c:ptCount val="1"/>
-                <c:pt idx="0">
-                  <c:v>Ward Health</c:v>
-                </c:pt>
-              </c:strCache>
-            </c:strRef>
-          </c:tx>
-          <c:spPr>
-            <a:solidFill>
-              <a:schemeClr val="accent1"/>
-            </a:solidFill>
-            <a:ln w="9525" cap="flat">
-              <a:solidFill>
-                <a:srgbClr val="F9F9F9"/>
-              </a:solidFill>
-              <a:prstDash val="solid"/>
-              <a:round/>
-            </a:ln>
-            <a:effectLst/>
-          </c:spPr>
-          <c:dPt>
-            <c:idx val="0"/>
-            <c:bubble3D val="0"/>
-            <c:spPr>
-              <a:solidFill>
-                <a:srgbClr val="00FF88"/>
-              </a:solidFill>
-              <a:ln w="9525" cap="flat">
-                <a:solidFill>
-                  <a:srgbClr val="0F1713"/>
-                </a:solidFill>
-                <a:prstDash val="solid"/>
-                <a:round/>
-              </a:ln>
-              <a:effectLst/>
-            </c:spPr>
-          </c:dPt>
-          <c:dPt>
-            <c:idx val="1"/>
-            <c:bubble3D val="0"/>
-            <c:spPr>
-              <a:solidFill>
-                <a:srgbClr val="1A211D"/>
-              </a:solidFill>
-              <a:ln w="9525" cap="flat">
-                <a:solidFill>
-                  <a:srgbClr val="0F1713"/>
-                </a:solidFill>
-                <a:prstDash val="solid"/>
-                <a:round/>
-              </a:ln>
-              <a:effectLst/>
-            </c:spPr>
-          </c:dPt>
-          <c:dLbls>
-            <c:dLbl>
-              <c:idx val="0"/>
-              <c:numFmt formatCode="General" sourceLinked="0"/>
-              <c:spPr/>
-              <c:txPr>
-                <a:bodyPr/>
-                <a:lstStyle/>
-                <a:p>
-                  <a:pPr>
-                    <a:defRPr sz="1200" b="0" i="0" u="none" strike="noStrike">
-                      <a:solidFill>
-                        <a:srgbClr val="000000"/>
-                      </a:solidFill>
-                      <a:latin typeface="Arial"/>
-                    </a:defRPr>
-                  </a:pPr>
-                </a:p>
-              </c:txPr>
-              <c:showLegendKey val="0"/>
-              <c:showVal val="0"/>
-              <c:showCatName val="0"/>
-              <c:showSerName val="0"/>
-              <c:showPercent val="0"/>
-              <c:showBubbleSize val="0"/>
-            </c:dLbl>
-            <c:dLbl>
-              <c:idx val="1"/>
-              <c:numFmt formatCode="General" sourceLinked="0"/>
-              <c:spPr/>
-              <c:txPr>
-                <a:bodyPr/>
-                <a:lstStyle/>
-                <a:p>
-                  <a:pPr>
-                    <a:defRPr sz="1200" b="0" i="0" u="none" strike="noStrike">
-                      <a:solidFill>
-                        <a:srgbClr val="000000"/>
-                      </a:solidFill>
-                      <a:latin typeface="Arial"/>
-                    </a:defRPr>
-                  </a:pPr>
-                </a:p>
-              </c:txPr>
-              <c:showLegendKey val="0"/>
-              <c:showVal val="0"/>
-              <c:showCatName val="0"/>
-              <c:showSerName val="0"/>
-              <c:showPercent val="0"/>
-              <c:showBubbleSize val="0"/>
-            </c:dLbl>
-            <c:numFmt formatCode="General" sourceLinked="0"/>
-            <c:txPr>
-              <a:bodyPr/>
-              <a:lstStyle/>
-              <a:p>
-                <a:pPr>
-                  <a:defRPr sz="1800" b="0" i="0" u="none" strike="noStrike">
-                    <a:solidFill>
-                      <a:srgbClr val="000000"/>
-                    </a:solidFill>
-                    <a:latin typeface="Arial"/>
-                  </a:defRPr>
-                </a:pPr>
-              </a:p>
-            </c:txPr>
-            <c:showLegendKey val="0"/>
-            <c:showVal val="0"/>
-            <c:showCatName val="1"/>
-            <c:showSerName val="0"/>
-            <c:showPercent val="1"/>
-            <c:showBubbleSize val="0"/>
-            <c:showLeaderLines val="0"/>
-          </c:dLbls>
-          <c:cat>
-            <c:strRef>
-              <c:f>Sheet1!$A$2:$A$3</c:f>
-              <c:strCache>
-                <c:ptCount val="2"/>
-                <c:pt idx="0">
-                  <c:v>Healthy</c:v>
-                </c:pt>
-                <c:pt idx="1">
-                  <c:v>Remaining</c:v>
-                </c:pt>
-              </c:strCache>
-            </c:strRef>
-          </c:cat>
-          <c:val>
-            <c:numRef>
-              <c:f>Sheet1!$B$2:$B$3</c:f>
-              <c:numCache>
-                <c:ptCount val="2"/>
-                <c:pt idx="0">
-                  <c:v>88</c:v>
-                </c:pt>
-                <c:pt idx="1">
-                  <c:v>12</c:v>
-                </c:pt>
-              </c:numCache>
-            </c:numRef>
-          </c:val>
-        </c:ser>
-        <c:firstSliceAng val="0"/>
-        <c:holeSize val="70"/>
-      </c:doughnutChart>
-      <c:spPr>
-        <a:noFill/>
-        <a:ln>
-          <a:noFill/>
-        </a:ln>
-        <a:effectLst/>
-      </c:spPr>
-    </c:plotArea>
-    <c:plotVisOnly val="1"/>
-    <c:dispBlanksAs val="span"/>
-  </c:chart>
-  <c:spPr>
-    <a:noFill/>
-    <a:ln>
-      <a:noFill/>
-    </a:ln>
-    <a:effectLst/>
-  </c:spPr>
-  <c:externalData r:id="rId1">
-    <c:autoUpdate val="0"/>
-  </c:externalData>
-</c:chartSpace>
 </file>
 
 <file path=ppt/notesMasters/notesMaster1.xml><?xml version="1.0" encoding="utf-8"?>
@@ -2180,8 +1979,8 @@
         </p:nvSpPr>
         <p:spPr>
           <a:xfrm>
-            <a:off x="0" y="3108960"/>
-            <a:ext cx="12188952" cy="457200"/>
+            <a:off x="0" y="3063240"/>
+            <a:ext cx="12188952" cy="411480"/>
           </a:xfrm>
           <a:prstGeom prst="rect">
             <a:avLst/>
@@ -2219,8 +2018,47 @@
         </p:nvSpPr>
         <p:spPr>
           <a:xfrm>
-            <a:off x="1979676" y="3611880"/>
-            <a:ext cx="8229600" cy="640080"/>
+            <a:off x="0" y="3456432"/>
+            <a:ext cx="12188952" cy="274320"/>
+          </a:xfrm>
+          <a:prstGeom prst="rect">
+            <a:avLst/>
+          </a:prstGeom>
+          <a:noFill/>
+          <a:ln/>
+        </p:spPr>
+        <p:txBody>
+          <a:bodyPr wrap="square" lIns="0" tIns="0" rIns="0" bIns="0" rtlCol="0" anchor="ctr"/>
+          <a:lstStyle/>
+          <a:p>
+            <a:pPr algn="ctr" indent="0" marL="0">
+              <a:buNone/>
+            </a:pPr>
+            <a:r>
+              <a:rPr lang="en-US" sz="1000" b="1" spc="150" kern="0" dirty="0">
+                <a:solidFill>
+                  <a:srgbClr val="00FF88"/>
+                </a:solidFill>
+                <a:latin typeface="Courier New" pitchFamily="34" charset="0"/>
+                <a:ea typeface="Courier New" pitchFamily="34" charset="-122"/>
+                <a:cs typeface="Courier New" pitchFamily="34" charset="-120"/>
+              </a:rPr>
+              <a:t>ANONYMOUS · REAL-TIME RESOLUTION</a:t>
+            </a:r>
+            <a:endParaRPr lang="en-US" sz="1000" dirty="0"/>
+          </a:p>
+        </p:txBody>
+      </p:sp>
+      <p:sp>
+        <p:nvSpPr>
+          <p:cNvPr id="13" name="Text 11"/>
+          <p:cNvSpPr txBox="1"/>
+          <p:nvPr/>
+        </p:nvSpPr>
+        <p:spPr>
+          <a:xfrm>
+            <a:off x="1979676" y="3794760"/>
+            <a:ext cx="8229600" cy="548640"/>
           </a:xfrm>
           <a:prstGeom prst="rect">
             <a:avLst/>
@@ -2255,13 +2093,13 @@
       </p:sp>
       <p:sp>
         <p:nvSpPr>
-          <p:cNvPr id="13" name="Shape 11"/>
+          <p:cNvPr id="14" name="Shape 12"/>
           <p:cNvSpPr/>
           <p:nvPr/>
         </p:nvSpPr>
         <p:spPr>
           <a:xfrm>
-            <a:off x="5225796" y="4434840"/>
+            <a:off x="5225796" y="4526280"/>
             <a:ext cx="1737360" cy="384048"/>
           </a:xfrm>
           <a:prstGeom prst="roundRect">
@@ -2284,13 +2122,13 @@
       </p:sp>
       <p:sp>
         <p:nvSpPr>
-          <p:cNvPr id="14" name="Text 12"/>
-          <p:cNvSpPr txBox="1"/>
-          <p:nvPr/>
-        </p:nvSpPr>
-        <p:spPr>
-          <a:xfrm>
-            <a:off x="5225796" y="4434840"/>
+          <p:cNvPr id="15" name="Text 13"/>
+          <p:cNvSpPr txBox="1"/>
+          <p:nvPr/>
+        </p:nvSpPr>
+        <p:spPr>
+          <a:xfrm>
+            <a:off x="5225796" y="4526280"/>
             <a:ext cx="1737360" cy="384048"/>
           </a:xfrm>
           <a:prstGeom prst="rect">
@@ -2354,8 +2192,8 @@
         </p:nvSpPr>
         <p:spPr>
           <a:xfrm>
-            <a:off x="0" y="1371600"/>
-            <a:ext cx="12188952" cy="320040"/>
+            <a:off x="0" y="1234440"/>
+            <a:ext cx="12188952" cy="274320"/>
           </a:xfrm>
           <a:prstGeom prst="rect">
             <a:avLst/>
@@ -2393,7 +2231,46 @@
         </p:nvSpPr>
         <p:spPr>
           <a:xfrm>
-            <a:off x="548640" y="1783080"/>
+            <a:off x="0" y="1234440"/>
+            <a:ext cx="11640312" cy="274320"/>
+          </a:xfrm>
+          <a:prstGeom prst="rect">
+            <a:avLst/>
+          </a:prstGeom>
+          <a:noFill/>
+          <a:ln/>
+        </p:spPr>
+        <p:txBody>
+          <a:bodyPr wrap="square" lIns="0" tIns="0" rIns="0" bIns="0" rtlCol="0" anchor="ctr"/>
+          <a:lstStyle/>
+          <a:p>
+            <a:pPr algn="r" indent="0" marL="0">
+              <a:buNone/>
+            </a:pPr>
+            <a:r>
+              <a:rPr lang="en-US" sz="1000" dirty="0">
+                <a:solidFill>
+                  <a:srgbClr val="8E9FA8"/>
+                </a:solidFill>
+                <a:latin typeface="Courier New" pitchFamily="34" charset="0"/>
+                <a:ea typeface="Courier New" pitchFamily="34" charset="-122"/>
+                <a:cs typeface="Courier New" pitchFamily="34" charset="-120"/>
+              </a:rPr>
+              <a:t>10 / 10</a:t>
+            </a:r>
+            <a:endParaRPr lang="en-US" sz="1000" dirty="0"/>
+          </a:p>
+        </p:txBody>
+      </p:sp>
+      <p:sp>
+        <p:nvSpPr>
+          <p:cNvPr id="4" name="Text 2"/>
+          <p:cNvSpPr txBox="1"/>
+          <p:nvPr/>
+        </p:nvSpPr>
+        <p:spPr>
+          <a:xfrm>
+            <a:off x="548640" y="1645920"/>
             <a:ext cx="11091672" cy="822960"/>
           </a:xfrm>
           <a:prstGeom prst="rect">
@@ -2418,7 +2295,7 @@
                 <a:ea typeface="Arial" pitchFamily="34" charset="-122"/>
                 <a:cs typeface="Arial" pitchFamily="34" charset="-120"/>
               </a:rPr>
-              <a:t>Let's Put One Ward </a:t>
+              <a:t>The </a:t>
             </a:r>
             <a:pPr algn="ctr" indent="0" marL="0">
               <a:buNone/>
@@ -2432,7 +2309,7 @@
                 <a:ea typeface="Arial" pitchFamily="34" charset="-122"/>
                 <a:cs typeface="Arial" pitchFamily="34" charset="-120"/>
               </a:rPr>
-              <a:t>on the Platform.</a:t>
+              <a:t>30-Day Ward Pilot</a:t>
             </a:r>
             <a:endParaRPr lang="en-US" sz="3000" dirty="0"/>
           </a:p>
@@ -2440,13 +2317,13 @@
       </p:sp>
       <p:sp>
         <p:nvSpPr>
-          <p:cNvPr id="4" name="Text 2"/>
-          <p:cNvSpPr txBox="1"/>
-          <p:nvPr/>
-        </p:nvSpPr>
-        <p:spPr>
-          <a:xfrm>
-            <a:off x="1979676" y="2606040"/>
+          <p:cNvPr id="5" name="Text 3"/>
+          <p:cNvSpPr txBox="1"/>
+          <p:nvPr/>
+        </p:nvSpPr>
+        <p:spPr>
+          <a:xfrm>
+            <a:off x="1979676" y="2468880"/>
             <a:ext cx="8229600" cy="548640"/>
           </a:xfrm>
           <a:prstGeom prst="rect">
@@ -2474,7 +2351,7 @@
                 <a:ea typeface="Arial" pitchFamily="34" charset="-122"/>
                 <a:cs typeface="Arial" pitchFamily="34" charset="-120"/>
               </a:rPr>
-              <a:t>A 30-day pilot. No procurement cycle required to start the conversation — setup takes under two weeks.</a:t>
+              <a:t>No procurement cycle required to start the conversation — setup takes under two weeks, one ward at a time.</a:t>
             </a:r>
             <a:endParaRPr lang="en-US" sz="1400" dirty="0"/>
           </a:p>
@@ -2482,7 +2359,7 @@
       </p:sp>
       <p:sp>
         <p:nvSpPr>
-          <p:cNvPr id="5" name="Shape 3"/>
+          <p:cNvPr id="6" name="Shape 4"/>
           <p:cNvSpPr/>
           <p:nvPr/>
         </p:nvSpPr>
@@ -2504,7 +2381,7 @@
       </p:sp>
       <p:sp>
         <p:nvSpPr>
-          <p:cNvPr id="6" name="Text 4">
+          <p:cNvPr id="7" name="Text 5">
             <a:hlinkClick r:id="rId1" tooltip=""/>
           </p:cNvPr>
           <p:cNvSpPr txBox="1"/>
@@ -2552,7 +2429,7 @@
       </p:sp>
       <p:sp>
         <p:nvSpPr>
-          <p:cNvPr id="7" name="Shape 5"/>
+          <p:cNvPr id="8" name="Shape 6"/>
           <p:cNvSpPr/>
           <p:nvPr/>
         </p:nvSpPr>
@@ -2576,7 +2453,7 @@
       </p:sp>
       <p:sp>
         <p:nvSpPr>
-          <p:cNvPr id="8" name="Text 6">
+          <p:cNvPr id="9" name="Text 7">
             <a:hlinkClick r:id="rId2" tooltip=""/>
           </p:cNvPr>
           <p:cNvSpPr txBox="1"/>
@@ -2624,7 +2501,7 @@
       </p:sp>
       <p:sp>
         <p:nvSpPr>
-          <p:cNvPr id="9" name="Text 7"/>
+          <p:cNvPr id="10" name="Text 8"/>
           <p:cNvSpPr txBox="1"/>
           <p:nvPr/>
         </p:nvSpPr>
@@ -3285,7 +3162,7 @@
         <p:spPr>
           <a:xfrm>
             <a:off x="777240" y="2194560"/>
-            <a:ext cx="681228" cy="256032"/>
+            <a:ext cx="1435608" cy="256032"/>
           </a:xfrm>
           <a:prstGeom prst="roundRect">
             <a:avLst>
@@ -3311,7 +3188,7 @@
         <p:spPr>
           <a:xfrm>
             <a:off x="777240" y="2194560"/>
-            <a:ext cx="681228" cy="256032"/>
+            <a:ext cx="1435608" cy="256032"/>
           </a:xfrm>
           <a:prstGeom prst="rect">
             <a:avLst/>
@@ -3335,7 +3212,7 @@
                 <a:ea typeface="Courier New" pitchFamily="34" charset="-122"/>
                 <a:cs typeface="Courier New" pitchFamily="34" charset="-120"/>
               </a:rPr>
-              <a:t>GATEWAY</a:t>
+              <a:t>MODULE 1 · GATEWAY</a:t>
             </a:r>
             <a:endParaRPr lang="en-US" sz="900" dirty="0"/>
           </a:p>
@@ -3374,7 +3251,7 @@
                 <a:ea typeface="Arial" pitchFamily="34" charset="-122"/>
                 <a:cs typeface="Arial" pitchFamily="34" charset="-120"/>
               </a:rPr>
-              <a:t>Public Gateway</a:t>
+              <a:t>Gateway</a:t>
             </a:r>
             <a:endParaRPr lang="en-US" sz="1500" dirty="0"/>
           </a:p>
@@ -3416,7 +3293,7 @@
                 <a:ea typeface="Arial" pitchFamily="34" charset="-122"/>
                 <a:cs typeface="Arial" pitchFamily="34" charset="-120"/>
               </a:rPr>
-              <a:t>Live, public ward-health dashboard — resolution SLA, dispatch capacity, and resolve rate, visible without a login.</a:t>
+              <a:t>The public civic web dashboard — jurisdiction auto-detection, live ward-health telemetry, the immutable public ledger, a QR install card, and the Civic Tools drawer. No login required.</a:t>
             </a:r>
             <a:endParaRPr lang="en-US" sz="1150" dirty="0"/>
           </a:p>
@@ -3458,7 +3335,7 @@
         <p:spPr>
           <a:xfrm>
             <a:off x="4535424" y="2194560"/>
-            <a:ext cx="406908" cy="256032"/>
+            <a:ext cx="1778508" cy="256032"/>
           </a:xfrm>
           <a:prstGeom prst="roundRect">
             <a:avLst>
@@ -3484,7 +3361,7 @@
         <p:spPr>
           <a:xfrm>
             <a:off x="4535424" y="2194560"/>
-            <a:ext cx="406908" cy="256032"/>
+            <a:ext cx="1778508" cy="256032"/>
           </a:xfrm>
           <a:prstGeom prst="rect">
             <a:avLst/>
@@ -3508,7 +3385,7 @@
                 <a:ea typeface="Courier New" pitchFamily="34" charset="-122"/>
                 <a:cs typeface="Courier New" pitchFamily="34" charset="-120"/>
               </a:rPr>
-              <a:t>PWA</a:t>
+              <a:t>MODULE 2 · PWA REPORTER</a:t>
             </a:r>
             <a:endParaRPr lang="en-US" sz="900" dirty="0"/>
           </a:p>
@@ -3547,7 +3424,7 @@
                 <a:ea typeface="Arial" pitchFamily="34" charset="-122"/>
                 <a:cs typeface="Arial" pitchFamily="34" charset="-120"/>
               </a:rPr>
-              <a:t>Citizen Reporter</a:t>
+              <a:t>PWA Reporter</a:t>
             </a:r>
             <a:endParaRPr lang="en-US" sz="1500" dirty="0"/>
           </a:p>
@@ -3589,7 +3466,7 @@
                 <a:ea typeface="Arial" pitchFamily="34" charset="-122"/>
                 <a:cs typeface="Arial" pitchFamily="34" charset="-120"/>
               </a:rPr>
-              <a:t>Zero-account mobile reporting. Category, photo, description — EXIF and GPS stripped before upload, submitted in under 60 seconds.</a:t>
+              <a:t>The zero-account mobile hazard-reporting app — the 4-tier legal stack, fog-of-war spatial grid, live map, and feed. EXIF and GPS are stripped from every photo before it leaves the device.</a:t>
             </a:r>
             <a:endParaRPr lang="en-US" sz="1150" dirty="0"/>
           </a:p>
@@ -3631,7 +3508,7 @@
         <p:spPr>
           <a:xfrm>
             <a:off x="8293608" y="2194560"/>
-            <a:ext cx="681228" cy="256032"/>
+            <a:ext cx="1435608" cy="256032"/>
           </a:xfrm>
           <a:prstGeom prst="roundRect">
             <a:avLst>
@@ -3657,7 +3534,7 @@
         <p:spPr>
           <a:xfrm>
             <a:off x="8293608" y="2194560"/>
-            <a:ext cx="681228" cy="256032"/>
+            <a:ext cx="1435608" cy="256032"/>
           </a:xfrm>
           <a:prstGeom prst="rect">
             <a:avLst/>
@@ -3681,7 +3558,7 @@
                 <a:ea typeface="Courier New" pitchFamily="34" charset="-122"/>
                 <a:cs typeface="Courier New" pitchFamily="34" charset="-120"/>
               </a:rPr>
-              <a:t>CONSOLE</a:t>
+              <a:t>MODULE 3 · CONSOLE</a:t>
             </a:r>
             <a:endParaRPr lang="en-US" sz="900" dirty="0"/>
           </a:p>
@@ -3762,7 +3639,7 @@
                 <a:ea typeface="Arial" pitchFamily="34" charset="-122"/>
                 <a:cs typeface="Arial" pitchFamily="34" charset="-120"/>
               </a:rPr>
-              <a:t>Real-time dispatch, SLA and severity queues, capital ledger, and one-click printable ward reporting for council packets.</a:t>
+              <a:t>The staff-facing dispatch console — severity-tiered ticket queues, a live GIS dispatch map, SLA tracking, the CapEx scoping ledger, AI-assisted quick-resolve, and printable Ward Reports for council packets.</a:t>
             </a:r>
             <a:endParaRPr lang="en-US" sz="1150" dirty="0"/>
           </a:p>
@@ -4677,7 +4554,7 @@
                 <a:ea typeface="Courier New" pitchFamily="34" charset="-122"/>
                 <a:cs typeface="Courier New" pitchFamily="34" charset="-120"/>
               </a:rPr>
-              <a:t>LIVE TELEMETRY</a:t>
+              <a:t>ACCOUNTABILITY</a:t>
             </a:r>
             <a:endParaRPr lang="en-US" sz="1100" dirty="0"/>
           </a:p>
@@ -4747,7 +4624,7 @@
               <a:buNone/>
             </a:pPr>
             <a:r>
-              <a:rPr lang="en-US" sz="3000" b="1" dirty="0">
+              <a:rPr lang="en-US" sz="2600" b="1" dirty="0">
                 <a:solidFill>
                   <a:srgbClr val="F8FAFC"/>
                 </a:solidFill>
@@ -4755,13 +4632,13 @@
                 <a:ea typeface="Arial" pitchFamily="34" charset="-122"/>
                 <a:cs typeface="Arial" pitchFamily="34" charset="-120"/>
               </a:rPr>
-              <a:t>Real-Time </a:t>
+              <a:t>Field Verification, </a:t>
             </a:r>
             <a:pPr indent="0" marL="0">
               <a:buNone/>
             </a:pPr>
             <a:r>
-              <a:rPr lang="en-US" sz="3000" b="1" dirty="0">
+              <a:rPr lang="en-US" sz="2600" b="1" dirty="0">
                 <a:solidFill>
                   <a:srgbClr val="00FF88"/>
                 </a:solidFill>
@@ -4769,26 +4646,68 @@
                 <a:ea typeface="Arial" pitchFamily="34" charset="-122"/>
                 <a:cs typeface="Arial" pitchFamily="34" charset="-120"/>
               </a:rPr>
-              <a:t>Ward Health Telemetry</a:t>
-            </a:r>
-            <a:endParaRPr lang="en-US" sz="3000" dirty="0"/>
-          </a:p>
-        </p:txBody>
-      </p:sp>
-      <p:sp>
-        <p:nvSpPr>
-          <p:cNvPr id="5" name="Shape 3"/>
+              <a:t>Not Ghost Closures</a:t>
+            </a:r>
+            <a:endParaRPr lang="en-US" sz="2600" dirty="0"/>
+          </a:p>
+        </p:txBody>
+      </p:sp>
+      <p:sp>
+        <p:nvSpPr>
+          <p:cNvPr id="5" name="Text 3"/>
+          <p:cNvSpPr txBox="1"/>
+          <p:nvPr/>
+        </p:nvSpPr>
+        <p:spPr>
+          <a:xfrm>
+            <a:off x="548640" y="1691640"/>
+            <a:ext cx="11091672" cy="822960"/>
+          </a:xfrm>
+          <a:prstGeom prst="rect">
+            <a:avLst/>
+          </a:prstGeom>
+          <a:noFill/>
+          <a:ln/>
+        </p:spPr>
+        <p:txBody>
+          <a:bodyPr wrap="square" lIns="0" tIns="0" rIns="0" bIns="0" rtlCol="0" anchor="ctr"/>
+          <a:lstStyle/>
+          <a:p>
+            <a:pPr indent="0" marL="0">
+              <a:lnSpc>
+                <a:spcPct val="135000"/>
+              </a:lnSpc>
+              <a:buNone/>
+            </a:pPr>
+            <a:r>
+              <a:rPr lang="en-US" sz="1400" dirty="0">
+                <a:solidFill>
+                  <a:srgbClr val="8E9FA8"/>
+                </a:solidFill>
+                <a:latin typeface="Arial" pitchFamily="34" charset="0"/>
+                <a:ea typeface="Arial" pitchFamily="34" charset="-122"/>
+                <a:cs typeface="Arial" pitchFamily="34" charset="-120"/>
+              </a:rPr>
+              <a:t>A ticket cannot close on paperwork alone. Every resolution requires a timestamped, EXIF-verified proof photo from the crew on site — pushed automatically to the public feed.</a:t>
+            </a:r>
+            <a:endParaRPr lang="en-US" sz="1400" dirty="0"/>
+          </a:p>
+        </p:txBody>
+      </p:sp>
+      <p:sp>
+        <p:nvSpPr>
+          <p:cNvPr id="6" name="Shape 4"/>
           <p:cNvSpPr/>
           <p:nvPr/>
         </p:nvSpPr>
         <p:spPr>
           <a:xfrm>
-            <a:off x="548640" y="2011680"/>
-            <a:ext cx="3575304" cy="3108960"/>
+            <a:off x="548640" y="2606040"/>
+            <a:ext cx="5408676" cy="2377440"/>
           </a:xfrm>
           <a:prstGeom prst="roundRect">
             <a:avLst>
-              <a:gd name="adj" fmla="val 3529"/>
+              <a:gd name="adj" fmla="val 4615"/>
             </a:avLst>
           </a:prstGeom>
           <a:solidFill>
@@ -4804,450 +4723,190 @@
       </p:sp>
       <p:sp>
         <p:nvSpPr>
-          <p:cNvPr id="6" name="Text 4"/>
-          <p:cNvSpPr txBox="1"/>
-          <p:nvPr/>
-        </p:nvSpPr>
-        <p:spPr>
-          <a:xfrm>
-            <a:off x="731520" y="2194560"/>
-            <a:ext cx="3209544" cy="274320"/>
-          </a:xfrm>
-          <a:prstGeom prst="rect">
-            <a:avLst/>
-          </a:prstGeom>
-          <a:noFill/>
-          <a:ln/>
-        </p:spPr>
-        <p:txBody>
-          <a:bodyPr wrap="square" lIns="0" tIns="0" rIns="0" bIns="0" rtlCol="0" anchor="ctr"/>
-          <a:lstStyle/>
-          <a:p>
-            <a:pPr algn="ctr" indent="0" marL="0">
-              <a:buNone/>
-            </a:pPr>
-            <a:r>
-              <a:rPr lang="en-US" sz="900" spc="100" kern="0" dirty="0">
-                <a:solidFill>
-                  <a:srgbClr val="8E9FA8"/>
+          <p:cNvPr id="7" name="Text 5"/>
+          <p:cNvSpPr txBox="1"/>
+          <p:nvPr/>
+        </p:nvSpPr>
+        <p:spPr>
+          <a:xfrm>
+            <a:off x="822960" y="2834640"/>
+            <a:ext cx="4860036" cy="274320"/>
+          </a:xfrm>
+          <a:prstGeom prst="rect">
+            <a:avLst/>
+          </a:prstGeom>
+          <a:noFill/>
+          <a:ln/>
+        </p:spPr>
+        <p:txBody>
+          <a:bodyPr wrap="square" lIns="0" tIns="0" rIns="0" bIns="0" rtlCol="0" anchor="ctr"/>
+          <a:lstStyle/>
+          <a:p>
+            <a:pPr indent="0" marL="0">
+              <a:buNone/>
+            </a:pPr>
+            <a:r>
+              <a:rPr lang="en-US" sz="1000" b="1" spc="100" kern="0" dirty="0">
+                <a:solidFill>
+                  <a:srgbClr val="00FF88"/>
                 </a:solidFill>
                 <a:latin typeface="Courier New" pitchFamily="34" charset="0"/>
                 <a:ea typeface="Courier New" pitchFamily="34" charset="-122"/>
                 <a:cs typeface="Courier New" pitchFamily="34" charset="-120"/>
               </a:rPr>
-              <a:t>WARD HEALTH INDEX</a:t>
-            </a:r>
-            <a:endParaRPr lang="en-US" sz="900" dirty="0"/>
-          </a:p>
-        </p:txBody>
-      </p:sp>
-      <p:graphicFrame>
-        <p:nvGraphicFramePr>
-          <p:cNvPr id="7" name="Chart 0" descr=""/>
-          <p:cNvGraphicFramePr/>
-          <p:nvPr/>
-        </p:nvGraphicFramePr>
-        <p:xfrm>
-          <a:off x="1421892" y="2514600"/>
-          <a:ext cx="1828800" cy="1828800"/>
-        </p:xfrm>
-        <a:graphic xmlns:a="http://schemas.openxmlformats.org/drawingml/2006/main">
-          <a:graphicData uri="http://schemas.openxmlformats.org/drawingml/2006/chart">
-            <c:chart xmlns:c="http://schemas.openxmlformats.org/drawingml/2006/chart" r:id="rId1"/>
-          </a:graphicData>
-        </a:graphic>
-      </p:graphicFrame>
-      <p:sp>
-        <p:nvSpPr>
-          <p:cNvPr id="8" name="Text 5"/>
-          <p:cNvSpPr txBox="1"/>
-          <p:nvPr/>
-        </p:nvSpPr>
-        <p:spPr>
-          <a:xfrm>
-            <a:off x="1421892" y="3154680"/>
-            <a:ext cx="1828800" cy="548640"/>
-          </a:xfrm>
-          <a:prstGeom prst="rect">
-            <a:avLst/>
-          </a:prstGeom>
-          <a:noFill/>
-          <a:ln/>
-        </p:spPr>
-        <p:txBody>
-          <a:bodyPr wrap="square" lIns="0" tIns="0" rIns="0" bIns="0" rtlCol="0" anchor="ctr"/>
-          <a:lstStyle/>
-          <a:p>
-            <a:pPr algn="ctr" indent="0" marL="0">
-              <a:buNone/>
-            </a:pPr>
-            <a:r>
-              <a:rPr lang="en-US" sz="2400" b="1" dirty="0">
-                <a:solidFill>
-                  <a:srgbClr val="F8FAFC"/>
+              <a:t>BEFORE</a:t>
+            </a:r>
+            <a:endParaRPr lang="en-US" sz="1000" dirty="0"/>
+          </a:p>
+        </p:txBody>
+      </p:sp>
+      <p:sp>
+        <p:nvSpPr>
+          <p:cNvPr id="8" name="Text 6"/>
+          <p:cNvSpPr txBox="1"/>
+          <p:nvPr/>
+        </p:nvSpPr>
+        <p:spPr>
+          <a:xfrm>
+            <a:off x="822960" y="3200400"/>
+            <a:ext cx="4860036" cy="1554480"/>
+          </a:xfrm>
+          <a:prstGeom prst="rect">
+            <a:avLst/>
+          </a:prstGeom>
+          <a:noFill/>
+          <a:ln/>
+        </p:spPr>
+        <p:txBody>
+          <a:bodyPr wrap="square" lIns="0" tIns="0" rIns="0" bIns="0" rtlCol="0" anchor="ctr"/>
+          <a:lstStyle/>
+          <a:p>
+            <a:pPr indent="0" marL="0">
+              <a:lnSpc>
+                <a:spcPct val="140000"/>
+              </a:lnSpc>
+              <a:buNone/>
+            </a:pPr>
+            <a:r>
+              <a:rPr lang="en-US" sz="1300" dirty="0">
+                <a:solidFill>
+                  <a:srgbClr val="8E9FA8"/>
                 </a:solidFill>
                 <a:latin typeface="Arial" pitchFamily="34" charset="0"/>
                 <a:ea typeface="Arial" pitchFamily="34" charset="-122"/>
                 <a:cs typeface="Arial" pitchFamily="34" charset="-120"/>
               </a:rPr>
-              <a:t>88%</a:t>
-            </a:r>
-            <a:endParaRPr lang="en-US" sz="2400" dirty="0"/>
-          </a:p>
-        </p:txBody>
-      </p:sp>
-      <p:sp>
-        <p:nvSpPr>
-          <p:cNvPr id="9" name="Text 6"/>
-          <p:cNvSpPr txBox="1"/>
-          <p:nvPr/>
-        </p:nvSpPr>
-        <p:spPr>
-          <a:xfrm>
-            <a:off x="731520" y="4572000"/>
-            <a:ext cx="3209544" cy="274320"/>
-          </a:xfrm>
-          <a:prstGeom prst="rect">
-            <a:avLst/>
-          </a:prstGeom>
-          <a:noFill/>
-          <a:ln/>
-        </p:spPr>
-        <p:txBody>
-          <a:bodyPr wrap="square" lIns="0" tIns="0" rIns="0" bIns="0" rtlCol="0" anchor="ctr"/>
-          <a:lstStyle/>
-          <a:p>
-            <a:pPr algn="ctr" indent="0" marL="0">
-              <a:buNone/>
-            </a:pPr>
-            <a:r>
-              <a:rPr lang="en-US" sz="1100" dirty="0">
-                <a:solidFill>
-                  <a:srgbClr val="8E9FA8"/>
+              <a:t>Dispatcher marks a ticket “Resolved” from a desk. No photo, no timestamp, no way to confirm a crew was ever on site.</a:t>
+            </a:r>
+            <a:endParaRPr lang="en-US" sz="1300" dirty="0"/>
+          </a:p>
+        </p:txBody>
+      </p:sp>
+      <p:sp>
+        <p:nvSpPr>
+          <p:cNvPr id="9" name="Shape 7"/>
+          <p:cNvSpPr/>
+          <p:nvPr/>
+        </p:nvSpPr>
+        <p:spPr>
+          <a:xfrm>
+            <a:off x="6231636" y="2606040"/>
+            <a:ext cx="5408676" cy="2377440"/>
+          </a:xfrm>
+          <a:prstGeom prst="roundRect">
+            <a:avLst>
+              <a:gd name="adj" fmla="val 4615"/>
+            </a:avLst>
+          </a:prstGeom>
+          <a:solidFill>
+            <a:srgbClr val="0F1713"/>
+          </a:solidFill>
+          <a:ln w="15875">
+            <a:solidFill>
+              <a:srgbClr val="00FF88"/>
+            </a:solidFill>
+            <a:prstDash val="solid"/>
+          </a:ln>
+        </p:spPr>
+      </p:sp>
+      <p:sp>
+        <p:nvSpPr>
+          <p:cNvPr id="10" name="Text 8"/>
+          <p:cNvSpPr txBox="1"/>
+          <p:nvPr/>
+        </p:nvSpPr>
+        <p:spPr>
+          <a:xfrm>
+            <a:off x="6505956" y="2834640"/>
+            <a:ext cx="4860036" cy="274320"/>
+          </a:xfrm>
+          <a:prstGeom prst="rect">
+            <a:avLst/>
+          </a:prstGeom>
+          <a:noFill/>
+          <a:ln/>
+        </p:spPr>
+        <p:txBody>
+          <a:bodyPr wrap="square" lIns="0" tIns="0" rIns="0" bIns="0" rtlCol="0" anchor="ctr"/>
+          <a:lstStyle/>
+          <a:p>
+            <a:pPr indent="0" marL="0">
+              <a:buNone/>
+            </a:pPr>
+            <a:r>
+              <a:rPr lang="en-US" sz="1000" b="1" spc="100" kern="0" dirty="0">
+                <a:solidFill>
+                  <a:srgbClr val="00FF88"/>
+                </a:solidFill>
+                <a:latin typeface="Courier New" pitchFamily="34" charset="0"/>
+                <a:ea typeface="Courier New" pitchFamily="34" charset="-122"/>
+                <a:cs typeface="Courier New" pitchFamily="34" charset="-120"/>
+              </a:rPr>
+              <a:t>WITH CITIXEN UX</a:t>
+            </a:r>
+            <a:endParaRPr lang="en-US" sz="1000" dirty="0"/>
+          </a:p>
+        </p:txBody>
+      </p:sp>
+      <p:sp>
+        <p:nvSpPr>
+          <p:cNvPr id="11" name="Text 9"/>
+          <p:cNvSpPr txBox="1"/>
+          <p:nvPr/>
+        </p:nvSpPr>
+        <p:spPr>
+          <a:xfrm>
+            <a:off x="6505956" y="3200400"/>
+            <a:ext cx="4860036" cy="1554480"/>
+          </a:xfrm>
+          <a:prstGeom prst="rect">
+            <a:avLst/>
+          </a:prstGeom>
+          <a:noFill/>
+          <a:ln/>
+        </p:spPr>
+        <p:txBody>
+          <a:bodyPr wrap="square" lIns="0" tIns="0" rIns="0" bIns="0" rtlCol="0" anchor="ctr"/>
+          <a:lstStyle/>
+          <a:p>
+            <a:pPr indent="0" marL="0">
+              <a:lnSpc>
+                <a:spcPct val="140000"/>
+              </a:lnSpc>
+              <a:buNone/>
+            </a:pPr>
+            <a:r>
+              <a:rPr lang="en-US" sz="1300" dirty="0">
+                <a:solidFill>
+                  <a:srgbClr val="F8FAFC"/>
                 </a:solidFill>
                 <a:latin typeface="Arial" pitchFamily="34" charset="0"/>
                 <a:ea typeface="Arial" pitchFamily="34" charset="-122"/>
                 <a:cs typeface="Arial" pitchFamily="34" charset="-120"/>
               </a:rPr>
-              <a:t>Ward 4 — Stable</a:t>
-            </a:r>
-            <a:endParaRPr lang="en-US" sz="1100" dirty="0"/>
-          </a:p>
-        </p:txBody>
-      </p:sp>
-      <p:sp>
-        <p:nvSpPr>
-          <p:cNvPr id="10" name="Shape 7"/>
-          <p:cNvSpPr/>
-          <p:nvPr/>
-        </p:nvSpPr>
-        <p:spPr>
-          <a:xfrm>
-            <a:off x="4306824" y="2011680"/>
-            <a:ext cx="3575304" cy="3108960"/>
-          </a:xfrm>
-          <a:prstGeom prst="roundRect">
-            <a:avLst>
-              <a:gd name="adj" fmla="val 3529"/>
-            </a:avLst>
-          </a:prstGeom>
-          <a:solidFill>
-            <a:srgbClr val="0F1713"/>
-          </a:solidFill>
-          <a:ln w="12700">
-            <a:solidFill>
-              <a:srgbClr val="263029"/>
-            </a:solidFill>
-            <a:prstDash val="solid"/>
-          </a:ln>
-        </p:spPr>
-      </p:sp>
-      <p:sp>
-        <p:nvSpPr>
-          <p:cNvPr id="11" name="Text 8"/>
-          <p:cNvSpPr txBox="1"/>
-          <p:nvPr/>
-        </p:nvSpPr>
-        <p:spPr>
-          <a:xfrm>
-            <a:off x="4489704" y="2331720"/>
-            <a:ext cx="3209544" cy="274320"/>
-          </a:xfrm>
-          <a:prstGeom prst="rect">
-            <a:avLst/>
-          </a:prstGeom>
-          <a:noFill/>
-          <a:ln/>
-        </p:spPr>
-        <p:txBody>
-          <a:bodyPr wrap="square" lIns="0" tIns="0" rIns="0" bIns="0" rtlCol="0" anchor="ctr"/>
-          <a:lstStyle/>
-          <a:p>
-            <a:pPr algn="ctr" indent="0" marL="0">
-              <a:buNone/>
-            </a:pPr>
-            <a:r>
-              <a:rPr lang="en-US" sz="900" spc="100" kern="0" dirty="0">
-                <a:solidFill>
-                  <a:srgbClr val="8E9FA8"/>
-                </a:solidFill>
-                <a:latin typeface="Courier New" pitchFamily="34" charset="0"/>
-                <a:ea typeface="Courier New" pitchFamily="34" charset="-122"/>
-                <a:cs typeface="Courier New" pitchFamily="34" charset="-120"/>
-              </a:rPr>
-              <a:t>AVG RESOLUTION SLA</a:t>
-            </a:r>
-            <a:endParaRPr lang="en-US" sz="900" dirty="0"/>
-          </a:p>
-        </p:txBody>
-      </p:sp>
-      <p:sp>
-        <p:nvSpPr>
-          <p:cNvPr id="12" name="Text 9"/>
-          <p:cNvSpPr txBox="1"/>
-          <p:nvPr/>
-        </p:nvSpPr>
-        <p:spPr>
-          <a:xfrm>
-            <a:off x="4489704" y="2834640"/>
-            <a:ext cx="3209544" cy="731520"/>
-          </a:xfrm>
-          <a:prstGeom prst="rect">
-            <a:avLst/>
-          </a:prstGeom>
-          <a:noFill/>
-          <a:ln/>
-        </p:spPr>
-        <p:txBody>
-          <a:bodyPr wrap="square" lIns="0" tIns="0" rIns="0" bIns="0" rtlCol="0" anchor="ctr"/>
-          <a:lstStyle/>
-          <a:p>
-            <a:pPr algn="ctr" indent="0" marL="0">
-              <a:buNone/>
-            </a:pPr>
-            <a:r>
-              <a:rPr lang="en-US" sz="3400" b="1" dirty="0">
-                <a:solidFill>
-                  <a:srgbClr val="00FF88"/>
-                </a:solidFill>
-                <a:latin typeface="Arial" pitchFamily="34" charset="0"/>
-                <a:ea typeface="Arial" pitchFamily="34" charset="-122"/>
-                <a:cs typeface="Arial" pitchFamily="34" charset="-120"/>
-              </a:rPr>
-              <a:t>18</a:t>
-            </a:r>
-            <a:pPr algn="ctr" indent="0" marL="0">
-              <a:buNone/>
-            </a:pPr>
-            <a:r>
-              <a:rPr lang="en-US" sz="1600" b="1" dirty="0">
-                <a:solidFill>
-                  <a:srgbClr val="8E9FA8"/>
-                </a:solidFill>
-                <a:latin typeface="Arial" pitchFamily="34" charset="0"/>
-                <a:ea typeface="Arial" pitchFamily="34" charset="-122"/>
-                <a:cs typeface="Arial" pitchFamily="34" charset="-120"/>
-              </a:rPr>
-              <a:t>hrs</a:t>
-            </a:r>
-            <a:endParaRPr lang="en-US" sz="3400" dirty="0"/>
-          </a:p>
-        </p:txBody>
-      </p:sp>
-      <p:sp>
-        <p:nvSpPr>
-          <p:cNvPr id="13" name="Text 10"/>
-          <p:cNvSpPr txBox="1"/>
-          <p:nvPr/>
-        </p:nvSpPr>
-        <p:spPr>
-          <a:xfrm>
-            <a:off x="4489704" y="3703320"/>
-            <a:ext cx="3209544" cy="457200"/>
-          </a:xfrm>
-          <a:prstGeom prst="rect">
-            <a:avLst/>
-          </a:prstGeom>
-          <a:noFill/>
-          <a:ln/>
-        </p:spPr>
-        <p:txBody>
-          <a:bodyPr wrap="square" lIns="0" tIns="0" rIns="0" bIns="0" rtlCol="0" anchor="ctr"/>
-          <a:lstStyle/>
-          <a:p>
-            <a:pPr algn="ctr" indent="0" marL="0">
-              <a:buNone/>
-            </a:pPr>
-            <a:r>
-              <a:rPr lang="en-US" sz="1050" dirty="0">
-                <a:solidFill>
-                  <a:srgbClr val="8E9FA8"/>
-                </a:solidFill>
-                <a:latin typeface="Arial" pitchFamily="34" charset="0"/>
-                <a:ea typeface="Arial" pitchFamily="34" charset="-122"/>
-                <a:cs typeface="Arial" pitchFamily="34" charset="-120"/>
-              </a:rPr>
-              <a:t>From report to crew close-out</a:t>
-            </a:r>
-            <a:endParaRPr lang="en-US" sz="1050" dirty="0"/>
-          </a:p>
-        </p:txBody>
-      </p:sp>
-      <p:sp>
-        <p:nvSpPr>
-          <p:cNvPr id="14" name="Shape 11"/>
-          <p:cNvSpPr/>
-          <p:nvPr/>
-        </p:nvSpPr>
-        <p:spPr>
-          <a:xfrm>
-            <a:off x="8065008" y="2011680"/>
-            <a:ext cx="3575304" cy="3108960"/>
-          </a:xfrm>
-          <a:prstGeom prst="roundRect">
-            <a:avLst>
-              <a:gd name="adj" fmla="val 3529"/>
-            </a:avLst>
-          </a:prstGeom>
-          <a:solidFill>
-            <a:srgbClr val="0F1713"/>
-          </a:solidFill>
-          <a:ln w="12700">
-            <a:solidFill>
-              <a:srgbClr val="263029"/>
-            </a:solidFill>
-            <a:prstDash val="solid"/>
-          </a:ln>
-        </p:spPr>
-      </p:sp>
-      <p:sp>
-        <p:nvSpPr>
-          <p:cNvPr id="15" name="Text 12"/>
-          <p:cNvSpPr txBox="1"/>
-          <p:nvPr/>
-        </p:nvSpPr>
-        <p:spPr>
-          <a:xfrm>
-            <a:off x="8247888" y="2331720"/>
-            <a:ext cx="3209544" cy="274320"/>
-          </a:xfrm>
-          <a:prstGeom prst="rect">
-            <a:avLst/>
-          </a:prstGeom>
-          <a:noFill/>
-          <a:ln/>
-        </p:spPr>
-        <p:txBody>
-          <a:bodyPr wrap="square" lIns="0" tIns="0" rIns="0" bIns="0" rtlCol="0" anchor="ctr"/>
-          <a:lstStyle/>
-          <a:p>
-            <a:pPr algn="ctr" indent="0" marL="0">
-              <a:buNone/>
-            </a:pPr>
-            <a:r>
-              <a:rPr lang="en-US" sz="900" spc="100" kern="0" dirty="0">
-                <a:solidFill>
-                  <a:srgbClr val="8E9FA8"/>
-                </a:solidFill>
-                <a:latin typeface="Courier New" pitchFamily="34" charset="0"/>
-                <a:ea typeface="Courier New" pitchFamily="34" charset="-122"/>
-                <a:cs typeface="Courier New" pitchFamily="34" charset="-120"/>
-              </a:rPr>
-              <a:t>WEEKLY RESOLVE RATE</a:t>
-            </a:r>
-            <a:endParaRPr lang="en-US" sz="900" dirty="0"/>
-          </a:p>
-        </p:txBody>
-      </p:sp>
-      <p:sp>
-        <p:nvSpPr>
-          <p:cNvPr id="16" name="Text 13"/>
-          <p:cNvSpPr txBox="1"/>
-          <p:nvPr/>
-        </p:nvSpPr>
-        <p:spPr>
-          <a:xfrm>
-            <a:off x="8247888" y="2834640"/>
-            <a:ext cx="3209544" cy="731520"/>
-          </a:xfrm>
-          <a:prstGeom prst="rect">
-            <a:avLst/>
-          </a:prstGeom>
-          <a:noFill/>
-          <a:ln/>
-        </p:spPr>
-        <p:txBody>
-          <a:bodyPr wrap="square" lIns="0" tIns="0" rIns="0" bIns="0" rtlCol="0" anchor="ctr"/>
-          <a:lstStyle/>
-          <a:p>
-            <a:pPr algn="ctr" indent="0" marL="0">
-              <a:buNone/>
-            </a:pPr>
-            <a:r>
-              <a:rPr lang="en-US" sz="3400" b="1" dirty="0">
-                <a:solidFill>
-                  <a:srgbClr val="00FF88"/>
-                </a:solidFill>
-                <a:latin typeface="Arial" pitchFamily="34" charset="0"/>
-                <a:ea typeface="Arial" pitchFamily="34" charset="-122"/>
-                <a:cs typeface="Arial" pitchFamily="34" charset="-120"/>
-              </a:rPr>
-              <a:t>84</a:t>
-            </a:r>
-            <a:pPr algn="ctr" indent="0" marL="0">
-              <a:buNone/>
-            </a:pPr>
-            <a:r>
-              <a:rPr lang="en-US" sz="1600" b="1" dirty="0">
-                <a:solidFill>
-                  <a:srgbClr val="8E9FA8"/>
-                </a:solidFill>
-                <a:latin typeface="Arial" pitchFamily="34" charset="0"/>
-                <a:ea typeface="Arial" pitchFamily="34" charset="-122"/>
-                <a:cs typeface="Arial" pitchFamily="34" charset="-120"/>
-              </a:rPr>
-              <a:t>/91</a:t>
-            </a:r>
-            <a:endParaRPr lang="en-US" sz="3400" dirty="0"/>
-          </a:p>
-        </p:txBody>
-      </p:sp>
-      <p:sp>
-        <p:nvSpPr>
-          <p:cNvPr id="17" name="Text 14"/>
-          <p:cNvSpPr txBox="1"/>
-          <p:nvPr/>
-        </p:nvSpPr>
-        <p:spPr>
-          <a:xfrm>
-            <a:off x="8247888" y="3703320"/>
-            <a:ext cx="3209544" cy="457200"/>
-          </a:xfrm>
-          <a:prstGeom prst="rect">
-            <a:avLst/>
-          </a:prstGeom>
-          <a:noFill/>
-          <a:ln/>
-        </p:spPr>
-        <p:txBody>
-          <a:bodyPr wrap="square" lIns="0" tIns="0" rIns="0" bIns="0" rtlCol="0" anchor="ctr"/>
-          <a:lstStyle/>
-          <a:p>
-            <a:pPr algn="ctr" indent="0" marL="0">
-              <a:buNone/>
-            </a:pPr>
-            <a:r>
-              <a:rPr lang="en-US" sz="1050" dirty="0">
-                <a:solidFill>
-                  <a:srgbClr val="8E9FA8"/>
-                </a:solidFill>
-                <a:latin typeface="Arial" pitchFamily="34" charset="0"/>
-                <a:ea typeface="Arial" pitchFamily="34" charset="-122"/>
-                <a:cs typeface="Arial" pitchFamily="34" charset="-120"/>
-              </a:rPr>
-              <a:t>Tickets resolved this week</a:t>
-            </a:r>
-            <a:endParaRPr lang="en-US" sz="1050" dirty="0"/>
+              <a:t>Closure requires a proof photo. EXIF timestamp + location are verified server-side, then the resolution posts to the resident's public feed automatically.</a:t>
+            </a:r>
+            <a:endParaRPr lang="en-US" sz="1300" dirty="0"/>
           </a:p>
         </p:txBody>
       </p:sp>
@@ -5309,7 +4968,7 @@
                 <a:ea typeface="Courier New" pitchFamily="34" charset="-122"/>
                 <a:cs typeface="Courier New" pitchFamily="34" charset="-120"/>
               </a:rPr>
-              <a:t>ACCOUNTABILITY</a:t>
+              <a:t>CAPITAL PLANNING</a:t>
             </a:r>
             <a:endParaRPr lang="en-US" sz="1100" dirty="0"/>
           </a:p>
@@ -5387,7 +5046,7 @@
                 <a:ea typeface="Arial" pitchFamily="34" charset="-122"/>
                 <a:cs typeface="Arial" pitchFamily="34" charset="-120"/>
               </a:rPr>
-              <a:t>Field Verification, </a:t>
+              <a:t>The </a:t>
             </a:r>
             <a:pPr indent="0" marL="0">
               <a:buNone/>
@@ -5401,7 +5060,7 @@
                 <a:ea typeface="Arial" pitchFamily="34" charset="-122"/>
                 <a:cs typeface="Arial" pitchFamily="34" charset="-120"/>
               </a:rPr>
-              <a:t>Not Ghost Closures</a:t>
+              <a:t>Immutable Public Ledger</a:t>
             </a:r>
             <a:endParaRPr lang="en-US" sz="2600" dirty="0"/>
           </a:p>
@@ -5443,7 +5102,7 @@
                 <a:ea typeface="Arial" pitchFamily="34" charset="-122"/>
                 <a:cs typeface="Arial" pitchFamily="34" charset="-120"/>
               </a:rPr>
-              <a:t>A ticket cannot close on paperwork alone. Every resolution requires a timestamped, EXIF-verified proof photo from the crew on site — pushed automatically to the public feed.</a:t>
+              <a:t>Every field-verified report feeds a live CapEx-scoping ledger — converting report density and condition data into concrete dollar figures the city can plan a capital budget around.</a:t>
             </a:r>
             <a:endParaRPr lang="en-US" sz="1400" dirty="0"/>
           </a:p>
@@ -5457,12 +5116,159 @@
         </p:nvSpPr>
         <p:spPr>
           <a:xfrm>
-            <a:off x="548640" y="2606040"/>
-            <a:ext cx="5408676" cy="2377440"/>
+            <a:off x="548640" y="2377440"/>
+            <a:ext cx="3575304" cy="1920240"/>
           </a:xfrm>
           <a:prstGeom prst="roundRect">
             <a:avLst>
-              <a:gd name="adj" fmla="val 4615"/>
+              <a:gd name="adj" fmla="val 5714"/>
+            </a:avLst>
+          </a:prstGeom>
+          <a:solidFill>
+            <a:srgbClr val="0F1713"/>
+          </a:solidFill>
+          <a:ln w="15875">
+            <a:solidFill>
+              <a:srgbClr val="00FF88"/>
+            </a:solidFill>
+            <a:prstDash val="solid"/>
+          </a:ln>
+        </p:spPr>
+      </p:sp>
+      <p:sp>
+        <p:nvSpPr>
+          <p:cNvPr id="7" name="Text 5"/>
+          <p:cNvSpPr txBox="1"/>
+          <p:nvPr/>
+        </p:nvSpPr>
+        <p:spPr>
+          <a:xfrm>
+            <a:off x="731520" y="2606040"/>
+            <a:ext cx="3209544" cy="274320"/>
+          </a:xfrm>
+          <a:prstGeom prst="rect">
+            <a:avLst/>
+          </a:prstGeom>
+          <a:noFill/>
+          <a:ln/>
+        </p:spPr>
+        <p:txBody>
+          <a:bodyPr wrap="square" lIns="0" tIns="0" rIns="0" bIns="0" rtlCol="0" anchor="ctr"/>
+          <a:lstStyle/>
+          <a:p>
+            <a:pPr algn="ctr" indent="0" marL="0">
+              <a:buNone/>
+            </a:pPr>
+            <a:r>
+              <a:rPr lang="en-US" sz="850" spc="100" kern="0" dirty="0">
+                <a:solidFill>
+                  <a:srgbClr val="8E9FA8"/>
+                </a:solidFill>
+                <a:latin typeface="Courier New" pitchFamily="34" charset="0"/>
+                <a:ea typeface="Courier New" pitchFamily="34" charset="-122"/>
+                <a:cs typeface="Courier New" pitchFamily="34" charset="-120"/>
+              </a:rPr>
+              <a:t>SCOPED CAPITAL SPEND</a:t>
+            </a:r>
+            <a:endParaRPr lang="en-US" sz="850" dirty="0"/>
+          </a:p>
+        </p:txBody>
+      </p:sp>
+      <p:sp>
+        <p:nvSpPr>
+          <p:cNvPr id="8" name="Text 6"/>
+          <p:cNvSpPr txBox="1"/>
+          <p:nvPr/>
+        </p:nvSpPr>
+        <p:spPr>
+          <a:xfrm>
+            <a:off x="731520" y="2926080"/>
+            <a:ext cx="3209544" cy="548640"/>
+          </a:xfrm>
+          <a:prstGeom prst="rect">
+            <a:avLst/>
+          </a:prstGeom>
+          <a:noFill/>
+          <a:ln/>
+        </p:spPr>
+        <p:txBody>
+          <a:bodyPr wrap="square" lIns="0" tIns="0" rIns="0" bIns="0" rtlCol="0" anchor="ctr"/>
+          <a:lstStyle/>
+          <a:p>
+            <a:pPr algn="ctr" indent="0" marL="0">
+              <a:buNone/>
+            </a:pPr>
+            <a:r>
+              <a:rPr lang="en-US" sz="2400" b="1" dirty="0">
+                <a:solidFill>
+                  <a:srgbClr val="00FF88"/>
+                </a:solidFill>
+                <a:latin typeface="Arial" pitchFamily="34" charset="0"/>
+                <a:ea typeface="Arial" pitchFamily="34" charset="-122"/>
+                <a:cs typeface="Arial" pitchFamily="34" charset="-120"/>
+              </a:rPr>
+              <a:t>$482,600</a:t>
+            </a:r>
+            <a:endParaRPr lang="en-US" sz="2400" dirty="0"/>
+          </a:p>
+        </p:txBody>
+      </p:sp>
+      <p:sp>
+        <p:nvSpPr>
+          <p:cNvPr id="9" name="Text 7"/>
+          <p:cNvSpPr txBox="1"/>
+          <p:nvPr/>
+        </p:nvSpPr>
+        <p:spPr>
+          <a:xfrm>
+            <a:off x="731520" y="3611880"/>
+            <a:ext cx="3209544" cy="548640"/>
+          </a:xfrm>
+          <a:prstGeom prst="rect">
+            <a:avLst/>
+          </a:prstGeom>
+          <a:noFill/>
+          <a:ln/>
+        </p:spPr>
+        <p:txBody>
+          <a:bodyPr wrap="square" lIns="0" tIns="0" rIns="0" bIns="0" rtlCol="0" anchor="ctr"/>
+          <a:lstStyle/>
+          <a:p>
+            <a:pPr algn="ctr" indent="0" marL="0">
+              <a:lnSpc>
+                <a:spcPct val="130000"/>
+              </a:lnSpc>
+              <a:buNone/>
+            </a:pPr>
+            <a:r>
+              <a:rPr lang="en-US" sz="1000" dirty="0">
+                <a:solidFill>
+                  <a:srgbClr val="8E9FA8"/>
+                </a:solidFill>
+                <a:latin typeface="Arial" pitchFamily="34" charset="0"/>
+                <a:ea typeface="Arial" pitchFamily="34" charset="-122"/>
+                <a:cs typeface="Arial" pitchFamily="34" charset="-120"/>
+              </a:rPr>
+              <a:t>CapEx Scoping Ledger · Track 2, current cycle</a:t>
+            </a:r>
+            <a:endParaRPr lang="en-US" sz="1000" dirty="0"/>
+          </a:p>
+        </p:txBody>
+      </p:sp>
+      <p:sp>
+        <p:nvSpPr>
+          <p:cNvPr id="10" name="Shape 8"/>
+          <p:cNvSpPr/>
+          <p:nvPr/>
+        </p:nvSpPr>
+        <p:spPr>
+          <a:xfrm>
+            <a:off x="4306824" y="2377440"/>
+            <a:ext cx="3575304" cy="1920240"/>
+          </a:xfrm>
+          <a:prstGeom prst="roundRect">
+            <a:avLst>
+              <a:gd name="adj" fmla="val 5714"/>
             </a:avLst>
           </a:prstGeom>
           <a:solidFill>
@@ -5478,107 +5284,146 @@
       </p:sp>
       <p:sp>
         <p:nvSpPr>
-          <p:cNvPr id="7" name="Text 5"/>
-          <p:cNvSpPr txBox="1"/>
-          <p:nvPr/>
-        </p:nvSpPr>
-        <p:spPr>
-          <a:xfrm>
-            <a:off x="822960" y="2834640"/>
-            <a:ext cx="4860036" cy="274320"/>
-          </a:xfrm>
-          <a:prstGeom prst="rect">
-            <a:avLst/>
-          </a:prstGeom>
-          <a:noFill/>
-          <a:ln/>
-        </p:spPr>
-        <p:txBody>
-          <a:bodyPr wrap="square" lIns="0" tIns="0" rIns="0" bIns="0" rtlCol="0" anchor="ctr"/>
-          <a:lstStyle/>
-          <a:p>
-            <a:pPr indent="0" marL="0">
-              <a:buNone/>
-            </a:pPr>
-            <a:r>
-              <a:rPr lang="en-US" sz="1000" b="1" spc="100" kern="0" dirty="0">
-                <a:solidFill>
-                  <a:srgbClr val="00FF88"/>
+          <p:cNvPr id="11" name="Text 9"/>
+          <p:cNvSpPr txBox="1"/>
+          <p:nvPr/>
+        </p:nvSpPr>
+        <p:spPr>
+          <a:xfrm>
+            <a:off x="4489704" y="2606040"/>
+            <a:ext cx="3209544" cy="274320"/>
+          </a:xfrm>
+          <a:prstGeom prst="rect">
+            <a:avLst/>
+          </a:prstGeom>
+          <a:noFill/>
+          <a:ln/>
+        </p:spPr>
+        <p:txBody>
+          <a:bodyPr wrap="square" lIns="0" tIns="0" rIns="0" bIns="0" rtlCol="0" anchor="ctr"/>
+          <a:lstStyle/>
+          <a:p>
+            <a:pPr algn="ctr" indent="0" marL="0">
+              <a:buNone/>
+            </a:pPr>
+            <a:r>
+              <a:rPr lang="en-US" sz="850" spc="100" kern="0" dirty="0">
+                <a:solidFill>
+                  <a:srgbClr val="8E9FA8"/>
                 </a:solidFill>
                 <a:latin typeface="Courier New" pitchFamily="34" charset="0"/>
                 <a:ea typeface="Courier New" pitchFamily="34" charset="-122"/>
                 <a:cs typeface="Courier New" pitchFamily="34" charset="-120"/>
               </a:rPr>
-              <a:t>BEFORE</a:t>
-            </a:r>
-            <a:endParaRPr lang="en-US" sz="1000" dirty="0"/>
-          </a:p>
-        </p:txBody>
-      </p:sp>
-      <p:sp>
-        <p:nvSpPr>
-          <p:cNvPr id="8" name="Text 6"/>
-          <p:cNvSpPr txBox="1"/>
-          <p:nvPr/>
-        </p:nvSpPr>
-        <p:spPr>
-          <a:xfrm>
-            <a:off x="822960" y="3200400"/>
-            <a:ext cx="4860036" cy="1554480"/>
-          </a:xfrm>
-          <a:prstGeom prst="rect">
-            <a:avLst/>
-          </a:prstGeom>
-          <a:noFill/>
-          <a:ln/>
-        </p:spPr>
-        <p:txBody>
-          <a:bodyPr wrap="square" lIns="0" tIns="0" rIns="0" bIns="0" rtlCol="0" anchor="ctr"/>
-          <a:lstStyle/>
-          <a:p>
-            <a:pPr indent="0" marL="0">
-              <a:lnSpc>
-                <a:spcPct val="140000"/>
-              </a:lnSpc>
-              <a:buNone/>
-            </a:pPr>
-            <a:r>
-              <a:rPr lang="en-US" sz="1300" dirty="0">
-                <a:solidFill>
-                  <a:srgbClr val="8E9FA8"/>
+              <a:t>GRID COVERAGE</a:t>
+            </a:r>
+            <a:endParaRPr lang="en-US" sz="850" dirty="0"/>
+          </a:p>
+        </p:txBody>
+      </p:sp>
+      <p:sp>
+        <p:nvSpPr>
+          <p:cNvPr id="12" name="Text 10"/>
+          <p:cNvSpPr txBox="1"/>
+          <p:nvPr/>
+        </p:nvSpPr>
+        <p:spPr>
+          <a:xfrm>
+            <a:off x="4489704" y="2926080"/>
+            <a:ext cx="3209544" cy="548640"/>
+          </a:xfrm>
+          <a:prstGeom prst="rect">
+            <a:avLst/>
+          </a:prstGeom>
+          <a:noFill/>
+          <a:ln/>
+        </p:spPr>
+        <p:txBody>
+          <a:bodyPr wrap="square" lIns="0" tIns="0" rIns="0" bIns="0" rtlCol="0" anchor="ctr"/>
+          <a:lstStyle/>
+          <a:p>
+            <a:pPr algn="ctr" indent="0" marL="0">
+              <a:buNone/>
+            </a:pPr>
+            <a:r>
+              <a:rPr lang="en-US" sz="3000" b="1" dirty="0">
+                <a:solidFill>
+                  <a:srgbClr val="00FF88"/>
                 </a:solidFill>
                 <a:latin typeface="Arial" pitchFamily="34" charset="0"/>
                 <a:ea typeface="Arial" pitchFamily="34" charset="-122"/>
                 <a:cs typeface="Arial" pitchFamily="34" charset="-120"/>
               </a:rPr>
-              <a:t>Dispatcher marks a ticket “Resolved” from a desk. No photo, no timestamp, no way to confirm a crew was ever on site.</a:t>
-            </a:r>
-            <a:endParaRPr lang="en-US" sz="1300" dirty="0"/>
-          </a:p>
-        </p:txBody>
-      </p:sp>
-      <p:sp>
-        <p:nvSpPr>
-          <p:cNvPr id="9" name="Shape 7"/>
+              <a:t>55%</a:t>
+            </a:r>
+            <a:endParaRPr lang="en-US" sz="3000" dirty="0"/>
+          </a:p>
+        </p:txBody>
+      </p:sp>
+      <p:sp>
+        <p:nvSpPr>
+          <p:cNvPr id="13" name="Text 11"/>
+          <p:cNvSpPr txBox="1"/>
+          <p:nvPr/>
+        </p:nvSpPr>
+        <p:spPr>
+          <a:xfrm>
+            <a:off x="4489704" y="3611880"/>
+            <a:ext cx="3209544" cy="548640"/>
+          </a:xfrm>
+          <a:prstGeom prst="rect">
+            <a:avLst/>
+          </a:prstGeom>
+          <a:noFill/>
+          <a:ln/>
+        </p:spPr>
+        <p:txBody>
+          <a:bodyPr wrap="square" lIns="0" tIns="0" rIns="0" bIns="0" rtlCol="0" anchor="ctr"/>
+          <a:lstStyle/>
+          <a:p>
+            <a:pPr algn="ctr" indent="0" marL="0">
+              <a:lnSpc>
+                <a:spcPct val="130000"/>
+              </a:lnSpc>
+              <a:buNone/>
+            </a:pPr>
+            <a:r>
+              <a:rPr lang="en-US" sz="1000" dirty="0">
+                <a:solidFill>
+                  <a:srgbClr val="8E9FA8"/>
+                </a:solidFill>
+                <a:latin typeface="Arial" pitchFamily="34" charset="0"/>
+                <a:ea typeface="Arial" pitchFamily="34" charset="-122"/>
+                <a:cs typeface="Arial" pitchFamily="34" charset="-120"/>
+              </a:rPr>
+              <a:t>Blocks field-verified across active wards</a:t>
+            </a:r>
+            <a:endParaRPr lang="en-US" sz="1000" dirty="0"/>
+          </a:p>
+        </p:txBody>
+      </p:sp>
+      <p:sp>
+        <p:nvSpPr>
+          <p:cNvPr id="14" name="Shape 12"/>
           <p:cNvSpPr/>
           <p:nvPr/>
         </p:nvSpPr>
         <p:spPr>
           <a:xfrm>
-            <a:off x="6231636" y="2606040"/>
-            <a:ext cx="5408676" cy="2377440"/>
+            <a:off x="8065008" y="2377440"/>
+            <a:ext cx="3575304" cy="1920240"/>
           </a:xfrm>
           <a:prstGeom prst="roundRect">
             <a:avLst>
-              <a:gd name="adj" fmla="val 4615"/>
+              <a:gd name="adj" fmla="val 5714"/>
             </a:avLst>
           </a:prstGeom>
           <a:solidFill>
             <a:srgbClr val="0F1713"/>
           </a:solidFill>
-          <a:ln w="15875">
+          <a:ln w="12700">
             <a:solidFill>
-              <a:srgbClr val="00FF88"/>
+              <a:srgbClr val="263029"/>
             </a:solidFill>
             <a:prstDash val="solid"/>
           </a:ln>
@@ -5586,82 +5431,160 @@
       </p:sp>
       <p:sp>
         <p:nvSpPr>
-          <p:cNvPr id="10" name="Text 8"/>
-          <p:cNvSpPr txBox="1"/>
-          <p:nvPr/>
-        </p:nvSpPr>
-        <p:spPr>
-          <a:xfrm>
-            <a:off x="6505956" y="2834640"/>
-            <a:ext cx="4860036" cy="274320"/>
-          </a:xfrm>
-          <a:prstGeom prst="rect">
-            <a:avLst/>
-          </a:prstGeom>
-          <a:noFill/>
-          <a:ln/>
-        </p:spPr>
-        <p:txBody>
-          <a:bodyPr wrap="square" lIns="0" tIns="0" rIns="0" bIns="0" rtlCol="0" anchor="ctr"/>
-          <a:lstStyle/>
-          <a:p>
-            <a:pPr indent="0" marL="0">
-              <a:buNone/>
-            </a:pPr>
-            <a:r>
-              <a:rPr lang="en-US" sz="1000" b="1" spc="100" kern="0" dirty="0">
-                <a:solidFill>
-                  <a:srgbClr val="00FF88"/>
+          <p:cNvPr id="15" name="Text 13"/>
+          <p:cNvSpPr txBox="1"/>
+          <p:nvPr/>
+        </p:nvSpPr>
+        <p:spPr>
+          <a:xfrm>
+            <a:off x="8247888" y="2606040"/>
+            <a:ext cx="3209544" cy="274320"/>
+          </a:xfrm>
+          <a:prstGeom prst="rect">
+            <a:avLst/>
+          </a:prstGeom>
+          <a:noFill/>
+          <a:ln/>
+        </p:spPr>
+        <p:txBody>
+          <a:bodyPr wrap="square" lIns="0" tIns="0" rIns="0" bIns="0" rtlCol="0" anchor="ctr"/>
+          <a:lstStyle/>
+          <a:p>
+            <a:pPr algn="ctr" indent="0" marL="0">
+              <a:buNone/>
+            </a:pPr>
+            <a:r>
+              <a:rPr lang="en-US" sz="850" spc="100" kern="0" dirty="0">
+                <a:solidFill>
+                  <a:srgbClr val="8E9FA8"/>
                 </a:solidFill>
                 <a:latin typeface="Courier New" pitchFamily="34" charset="0"/>
                 <a:ea typeface="Courier New" pitchFamily="34" charset="-122"/>
                 <a:cs typeface="Courier New" pitchFamily="34" charset="-120"/>
               </a:rPr>
-              <a:t>WITH CITIXEN UX</a:t>
-            </a:r>
-            <a:endParaRPr lang="en-US" sz="1000" dirty="0"/>
-          </a:p>
-        </p:txBody>
-      </p:sp>
-      <p:sp>
-        <p:nvSpPr>
-          <p:cNvPr id="11" name="Text 9"/>
-          <p:cNvSpPr txBox="1"/>
-          <p:nvPr/>
-        </p:nvSpPr>
-        <p:spPr>
-          <a:xfrm>
-            <a:off x="6505956" y="3200400"/>
-            <a:ext cx="4860036" cy="1554480"/>
-          </a:xfrm>
-          <a:prstGeom prst="rect">
-            <a:avLst/>
-          </a:prstGeom>
-          <a:noFill/>
-          <a:ln/>
-        </p:spPr>
-        <p:txBody>
-          <a:bodyPr wrap="square" lIns="0" tIns="0" rIns="0" bIns="0" rtlCol="0" anchor="ctr"/>
-          <a:lstStyle/>
-          <a:p>
-            <a:pPr indent="0" marL="0">
-              <a:lnSpc>
-                <a:spcPct val="140000"/>
-              </a:lnSpc>
-              <a:buNone/>
-            </a:pPr>
-            <a:r>
-              <a:rPr lang="en-US" sz="1300" dirty="0">
-                <a:solidFill>
-                  <a:srgbClr val="F8FAFC"/>
+              <a:t>POPULATION COVERED</a:t>
+            </a:r>
+            <a:endParaRPr lang="en-US" sz="850" dirty="0"/>
+          </a:p>
+        </p:txBody>
+      </p:sp>
+      <p:sp>
+        <p:nvSpPr>
+          <p:cNvPr id="16" name="Text 14"/>
+          <p:cNvSpPr txBox="1"/>
+          <p:nvPr/>
+        </p:nvSpPr>
+        <p:spPr>
+          <a:xfrm>
+            <a:off x="8247888" y="2926080"/>
+            <a:ext cx="3209544" cy="548640"/>
+          </a:xfrm>
+          <a:prstGeom prst="rect">
+            <a:avLst/>
+          </a:prstGeom>
+          <a:noFill/>
+          <a:ln/>
+        </p:spPr>
+        <p:txBody>
+          <a:bodyPr wrap="square" lIns="0" tIns="0" rIns="0" bIns="0" rtlCol="0" anchor="ctr"/>
+          <a:lstStyle/>
+          <a:p>
+            <a:pPr algn="ctr" indent="0" marL="0">
+              <a:buNone/>
+            </a:pPr>
+            <a:r>
+              <a:rPr lang="en-US" sz="3000" b="1" dirty="0">
+                <a:solidFill>
+                  <a:srgbClr val="00FF88"/>
                 </a:solidFill>
                 <a:latin typeface="Arial" pitchFamily="34" charset="0"/>
                 <a:ea typeface="Arial" pitchFamily="34" charset="-122"/>
                 <a:cs typeface="Arial" pitchFamily="34" charset="-120"/>
               </a:rPr>
-              <a:t>Closure requires a proof photo. EXIF timestamp + location are verified server-side, then the resolution posts to the resident's public feed automatically.</a:t>
-            </a:r>
-            <a:endParaRPr lang="en-US" sz="1300" dirty="0"/>
+              <a:t>52k</a:t>
+            </a:r>
+            <a:endParaRPr lang="en-US" sz="3000" dirty="0"/>
+          </a:p>
+        </p:txBody>
+      </p:sp>
+      <p:sp>
+        <p:nvSpPr>
+          <p:cNvPr id="17" name="Text 15"/>
+          <p:cNvSpPr txBox="1"/>
+          <p:nvPr/>
+        </p:nvSpPr>
+        <p:spPr>
+          <a:xfrm>
+            <a:off x="8247888" y="3611880"/>
+            <a:ext cx="3209544" cy="548640"/>
+          </a:xfrm>
+          <a:prstGeom prst="rect">
+            <a:avLst/>
+          </a:prstGeom>
+          <a:noFill/>
+          <a:ln/>
+        </p:spPr>
+        <p:txBody>
+          <a:bodyPr wrap="square" lIns="0" tIns="0" rIns="0" bIns="0" rtlCol="0" anchor="ctr"/>
+          <a:lstStyle/>
+          <a:p>
+            <a:pPr algn="ctr" indent="0" marL="0">
+              <a:lnSpc>
+                <a:spcPct val="130000"/>
+              </a:lnSpc>
+              <a:buNone/>
+            </a:pPr>
+            <a:r>
+              <a:rPr lang="en-US" sz="1000" dirty="0">
+                <a:solidFill>
+                  <a:srgbClr val="8E9FA8"/>
+                </a:solidFill>
+                <a:latin typeface="Arial" pitchFamily="34" charset="0"/>
+                <a:ea typeface="Arial" pitchFamily="34" charset="-122"/>
+                <a:cs typeface="Arial" pitchFamily="34" charset="-120"/>
+              </a:rPr>
+              <a:t>Residents represented in live ledger inputs</a:t>
+            </a:r>
+            <a:endParaRPr lang="en-US" sz="1000" dirty="0"/>
+          </a:p>
+        </p:txBody>
+      </p:sp>
+      <p:sp>
+        <p:nvSpPr>
+          <p:cNvPr id="18" name="Text 16"/>
+          <p:cNvSpPr txBox="1"/>
+          <p:nvPr/>
+        </p:nvSpPr>
+        <p:spPr>
+          <a:xfrm>
+            <a:off x="548640" y="4663440"/>
+            <a:ext cx="11091672" cy="365760"/>
+          </a:xfrm>
+          <a:prstGeom prst="rect">
+            <a:avLst/>
+          </a:prstGeom>
+          <a:noFill/>
+          <a:ln/>
+        </p:spPr>
+        <p:txBody>
+          <a:bodyPr wrap="square" lIns="0" tIns="0" rIns="0" bIns="0" rtlCol="0" anchor="ctr"/>
+          <a:lstStyle/>
+          <a:p>
+            <a:pPr algn="ctr" indent="0" marL="0">
+              <a:buNone/>
+            </a:pPr>
+            <a:r>
+              <a:rPr lang="en-US" sz="900" dirty="0">
+                <a:solidFill>
+                  <a:srgbClr val="8E9FA8"/>
+                </a:solidFill>
+                <a:latin typeface="Courier New" pitchFamily="34" charset="0"/>
+                <a:ea typeface="Courier New" pitchFamily="34" charset="-122"/>
+                <a:cs typeface="Courier New" pitchFamily="34" charset="-120"/>
+              </a:rPr>
+              <a:t>Priced as one flat $1.00 / resident / year municipal contract — no per-ticket fee, no seat licenses, no dispatch surcharge.</a:t>
+            </a:r>
+            <a:endParaRPr lang="en-US" sz="900" dirty="0"/>
           </a:p>
         </p:txBody>
       </p:sp>
@@ -5723,7 +5646,7 @@
                 <a:ea typeface="Courier New" pitchFamily="34" charset="-122"/>
                 <a:cs typeface="Courier New" pitchFamily="34" charset="-120"/>
               </a:rPr>
-              <a:t>CAPITAL PLANNING</a:t>
+              <a:t>ROI</a:t>
             </a:r>
             <a:endParaRPr lang="en-US" sz="1100" dirty="0"/>
           </a:p>
@@ -5801,7 +5724,7 @@
                 <a:ea typeface="Arial" pitchFamily="34" charset="-122"/>
                 <a:cs typeface="Arial" pitchFamily="34" charset="-120"/>
               </a:rPr>
-              <a:t>CapEx Scoping </a:t>
+              <a:t>Same Budget. </a:t>
             </a:r>
             <a:pPr indent="0" marL="0">
               <a:buNone/>
@@ -5815,7 +5738,7 @@
                 <a:ea typeface="Arial" pitchFamily="34" charset="-122"/>
                 <a:cs typeface="Arial" pitchFamily="34" charset="-120"/>
               </a:rPr>
-              <a:t>Ledger</a:t>
+              <a:t>Different Split.</a:t>
             </a:r>
             <a:endParaRPr lang="en-US" sz="3000" dirty="0"/>
           </a:p>
@@ -5857,7 +5780,7 @@
                 <a:ea typeface="Arial" pitchFamily="34" charset="-122"/>
                 <a:cs typeface="Arial" pitchFamily="34" charset="-120"/>
               </a:rPr>
-              <a:t>Every ticket contributes condition data to a live capital-scoping ledger — turning "we think Main Street needs repaving" into a dollar figure backed by real reports.</a:t>
+              <a:t>Same headcount, same dollars — reallocated once triage, routing, and reporting stop consuming staff hours. These are independent before/after deltas measured against the same budget cycle, not a fixed-sum split.</a:t>
             </a:r>
             <a:endParaRPr lang="en-US" sz="1400" dirty="0"/>
           </a:p>
@@ -5871,12 +5794,12 @@
         </p:nvSpPr>
         <p:spPr>
           <a:xfrm>
-            <a:off x="3717036" y="2743200"/>
-            <a:ext cx="4754880" cy="2286000"/>
+            <a:off x="1659636" y="2834640"/>
+            <a:ext cx="4206240" cy="2194560"/>
           </a:xfrm>
           <a:prstGeom prst="roundRect">
             <a:avLst>
-              <a:gd name="adj" fmla="val 4800"/>
+              <a:gd name="adj" fmla="val 5000"/>
             </a:avLst>
           </a:prstGeom>
           <a:solidFill>
@@ -5898,8 +5821,8 @@
         </p:nvSpPr>
         <p:spPr>
           <a:xfrm>
-            <a:off x="3717036" y="2971800"/>
-            <a:ext cx="4754880" cy="274320"/>
+            <a:off x="1842516" y="3108960"/>
+            <a:ext cx="3840480" cy="274320"/>
           </a:xfrm>
           <a:prstGeom prst="rect">
             <a:avLst/>
@@ -5915,7 +5838,7 @@
               <a:buNone/>
             </a:pPr>
             <a:r>
-              <a:rPr lang="en-US" sz="900" spc="100" kern="0" dirty="0">
+              <a:rPr lang="en-US" sz="950" spc="100" kern="0" dirty="0">
                 <a:solidFill>
                   <a:srgbClr val="8E9FA8"/>
                 </a:solidFill>
@@ -5923,9 +5846,9 @@
                 <a:ea typeface="Courier New" pitchFamily="34" charset="-122"/>
                 <a:cs typeface="Courier New" pitchFamily="34" charset="-120"/>
               </a:rPr>
-              <a:t>CAPEX SCOPING LEDGER — TRACK 2</a:t>
-            </a:r>
-            <a:endParaRPr lang="en-US" sz="900" dirty="0"/>
+              <a:t>FIELD EXECUTION CAPACITY</a:t>
+            </a:r>
+            <a:endParaRPr lang="en-US" sz="950" dirty="0"/>
           </a:p>
         </p:txBody>
       </p:sp>
@@ -5937,8 +5860,8 @@
         </p:nvSpPr>
         <p:spPr>
           <a:xfrm>
-            <a:off x="3717036" y="3337560"/>
-            <a:ext cx="4754880" cy="822960"/>
+            <a:off x="1842516" y="3520440"/>
+            <a:ext cx="3840480" cy="914400"/>
           </a:xfrm>
           <a:prstGeom prst="rect">
             <a:avLst/>
@@ -5954,7 +5877,7 @@
               <a:buNone/>
             </a:pPr>
             <a:r>
-              <a:rPr lang="en-US" sz="4000" b="1" dirty="0">
+              <a:rPr lang="en-US" sz="4600" b="1" dirty="0">
                 <a:solidFill>
                   <a:srgbClr val="00FF88"/>
                 </a:solidFill>
@@ -5962,9 +5885,9 @@
                 <a:ea typeface="Arial" pitchFamily="34" charset="-122"/>
                 <a:cs typeface="Arial" pitchFamily="34" charset="-120"/>
               </a:rPr>
-              <a:t>$482,600</a:t>
-            </a:r>
-            <a:endParaRPr lang="en-US" sz="4000" dirty="0"/>
+              <a:t>+34%</a:t>
+            </a:r>
+            <a:endParaRPr lang="en-US" sz="4600" dirty="0"/>
           </a:p>
         </p:txBody>
       </p:sp>
@@ -5976,8 +5899,8 @@
         </p:nvSpPr>
         <p:spPr>
           <a:xfrm>
-            <a:off x="3717036" y="4206240"/>
-            <a:ext cx="4754880" cy="365760"/>
+            <a:off x="1933956" y="4434840"/>
+            <a:ext cx="3657600" cy="457200"/>
           </a:xfrm>
           <a:prstGeom prst="rect">
             <a:avLst/>
@@ -5990,10 +5913,13 @@
           <a:lstStyle/>
           <a:p>
             <a:pPr algn="ctr" indent="0" marL="0">
-              <a:buNone/>
-            </a:pPr>
-            <a:r>
-              <a:rPr lang="en-US" sz="1200" dirty="0">
+              <a:lnSpc>
+                <a:spcPct val="130000"/>
+              </a:lnSpc>
+              <a:buNone/>
+            </a:pPr>
+            <a:r>
+              <a:rPr lang="en-US" sz="1100" dirty="0">
                 <a:solidFill>
                   <a:srgbClr val="8E9FA8"/>
                 </a:solidFill>
@@ -6001,9 +5927,156 @@
                 <a:ea typeface="Arial" pitchFamily="34" charset="-122"/>
                 <a:cs typeface="Arial" pitchFamily="34" charset="-120"/>
               </a:rPr>
-              <a:t>Scoped capital spend — current cycle, Ward 4</a:t>
-            </a:r>
-            <a:endParaRPr lang="en-US" sz="1200" dirty="0"/>
+              <a:t>Capital reallocated to field repair crews</a:t>
+            </a:r>
+            <a:endParaRPr lang="en-US" sz="1100" dirty="0"/>
+          </a:p>
+        </p:txBody>
+      </p:sp>
+      <p:sp>
+        <p:nvSpPr>
+          <p:cNvPr id="10" name="Shape 8"/>
+          <p:cNvSpPr/>
+          <p:nvPr/>
+        </p:nvSpPr>
+        <p:spPr>
+          <a:xfrm>
+            <a:off x="6323076" y="2834640"/>
+            <a:ext cx="4206240" cy="2194560"/>
+          </a:xfrm>
+          <a:prstGeom prst="roundRect">
+            <a:avLst>
+              <a:gd name="adj" fmla="val 5000"/>
+            </a:avLst>
+          </a:prstGeom>
+          <a:solidFill>
+            <a:srgbClr val="0F1713"/>
+          </a:solidFill>
+          <a:ln w="12700">
+            <a:solidFill>
+              <a:srgbClr val="263029"/>
+            </a:solidFill>
+            <a:prstDash val="solid"/>
+          </a:ln>
+        </p:spPr>
+      </p:sp>
+      <p:sp>
+        <p:nvSpPr>
+          <p:cNvPr id="11" name="Text 9"/>
+          <p:cNvSpPr txBox="1"/>
+          <p:nvPr/>
+        </p:nvSpPr>
+        <p:spPr>
+          <a:xfrm>
+            <a:off x="6505956" y="3108960"/>
+            <a:ext cx="3840480" cy="274320"/>
+          </a:xfrm>
+          <a:prstGeom prst="rect">
+            <a:avLst/>
+          </a:prstGeom>
+          <a:noFill/>
+          <a:ln/>
+        </p:spPr>
+        <p:txBody>
+          <a:bodyPr wrap="square" lIns="0" tIns="0" rIns="0" bIns="0" rtlCol="0" anchor="ctr"/>
+          <a:lstStyle/>
+          <a:p>
+            <a:pPr algn="ctr" indent="0" marL="0">
+              <a:buNone/>
+            </a:pPr>
+            <a:r>
+              <a:rPr lang="en-US" sz="950" spc="100" kern="0" dirty="0">
+                <a:solidFill>
+                  <a:srgbClr val="8E9FA8"/>
+                </a:solidFill>
+                <a:latin typeface="Courier New" pitchFamily="34" charset="0"/>
+                <a:ea typeface="Courier New" pitchFamily="34" charset="-122"/>
+                <a:cs typeface="Courier New" pitchFamily="34" charset="-120"/>
+              </a:rPr>
+              <a:t>ADMINISTRATIVE OVERHEAD</a:t>
+            </a:r>
+            <a:endParaRPr lang="en-US" sz="950" dirty="0"/>
+          </a:p>
+        </p:txBody>
+      </p:sp>
+      <p:sp>
+        <p:nvSpPr>
+          <p:cNvPr id="12" name="Text 10"/>
+          <p:cNvSpPr txBox="1"/>
+          <p:nvPr/>
+        </p:nvSpPr>
+        <p:spPr>
+          <a:xfrm>
+            <a:off x="6505956" y="3520440"/>
+            <a:ext cx="3840480" cy="914400"/>
+          </a:xfrm>
+          <a:prstGeom prst="rect">
+            <a:avLst/>
+          </a:prstGeom>
+          <a:noFill/>
+          <a:ln/>
+        </p:spPr>
+        <p:txBody>
+          <a:bodyPr wrap="square" lIns="0" tIns="0" rIns="0" bIns="0" rtlCol="0" anchor="ctr"/>
+          <a:lstStyle/>
+          <a:p>
+            <a:pPr algn="ctr" indent="0" marL="0">
+              <a:buNone/>
+            </a:pPr>
+            <a:r>
+              <a:rPr lang="en-US" sz="4600" b="1" dirty="0">
+                <a:solidFill>
+                  <a:srgbClr val="00FF88"/>
+                </a:solidFill>
+                <a:latin typeface="Arial" pitchFamily="34" charset="0"/>
+                <a:ea typeface="Arial" pitchFamily="34" charset="-122"/>
+                <a:cs typeface="Arial" pitchFamily="34" charset="-120"/>
+              </a:rPr>
+              <a:t>−18%</a:t>
+            </a:r>
+            <a:endParaRPr lang="en-US" sz="4600" dirty="0"/>
+          </a:p>
+        </p:txBody>
+      </p:sp>
+      <p:sp>
+        <p:nvSpPr>
+          <p:cNvPr id="13" name="Text 11"/>
+          <p:cNvSpPr txBox="1"/>
+          <p:nvPr/>
+        </p:nvSpPr>
+        <p:spPr>
+          <a:xfrm>
+            <a:off x="6597396" y="4434840"/>
+            <a:ext cx="3657600" cy="457200"/>
+          </a:xfrm>
+          <a:prstGeom prst="rect">
+            <a:avLst/>
+          </a:prstGeom>
+          <a:noFill/>
+          <a:ln/>
+        </p:spPr>
+        <p:txBody>
+          <a:bodyPr wrap="square" lIns="0" tIns="0" rIns="0" bIns="0" rtlCol="0" anchor="ctr"/>
+          <a:lstStyle/>
+          <a:p>
+            <a:pPr algn="ctr" indent="0" marL="0">
+              <a:lnSpc>
+                <a:spcPct val="130000"/>
+              </a:lnSpc>
+              <a:buNone/>
+            </a:pPr>
+            <a:r>
+              <a:rPr lang="en-US" sz="1100" dirty="0">
+                <a:solidFill>
+                  <a:srgbClr val="8E9FA8"/>
+                </a:solidFill>
+                <a:latin typeface="Arial" pitchFamily="34" charset="0"/>
+                <a:ea typeface="Arial" pitchFamily="34" charset="-122"/>
+                <a:cs typeface="Arial" pitchFamily="34" charset="-120"/>
+              </a:rPr>
+              <a:t>Reduction in desk triage &amp; routing burden</a:t>
+            </a:r>
+            <a:endParaRPr lang="en-US" sz="1100" dirty="0"/>
           </a:p>
         </p:txBody>
       </p:sp>
@@ -6065,7 +6138,7 @@
                 <a:ea typeface="Courier New" pitchFamily="34" charset="-122"/>
                 <a:cs typeface="Courier New" pitchFamily="34" charset="-120"/>
               </a:rPr>
-              <a:t>ROI</a:t>
+              <a:t>INTEGRATION</a:t>
             </a:r>
             <a:endParaRPr lang="en-US" sz="1100" dirty="0"/>
           </a:p>
@@ -6135,7 +6208,7 @@
               <a:buNone/>
             </a:pPr>
             <a:r>
-              <a:rPr lang="en-US" sz="3000" b="1" dirty="0">
+              <a:rPr lang="en-US" sz="2600" b="1" dirty="0">
                 <a:solidFill>
                   <a:srgbClr val="F8FAFC"/>
                 </a:solidFill>
@@ -6143,13 +6216,13 @@
                 <a:ea typeface="Arial" pitchFamily="34" charset="-122"/>
                 <a:cs typeface="Arial" pitchFamily="34" charset="-120"/>
               </a:rPr>
-              <a:t>Same Budget. </a:t>
+              <a:t>Built to Plug Into </a:t>
             </a:r>
             <a:pPr indent="0" marL="0">
               <a:buNone/>
             </a:pPr>
             <a:r>
-              <a:rPr lang="en-US" sz="3000" b="1" dirty="0">
+              <a:rPr lang="en-US" sz="2600" b="1" dirty="0">
                 <a:solidFill>
                   <a:srgbClr val="00FF88"/>
                 </a:solidFill>
@@ -6157,9 +6230,9 @@
                 <a:ea typeface="Arial" pitchFamily="34" charset="-122"/>
                 <a:cs typeface="Arial" pitchFamily="34" charset="-120"/>
               </a:rPr>
-              <a:t>Different Split.</a:t>
-            </a:r>
-            <a:endParaRPr lang="en-US" sz="3000" dirty="0"/>
+              <a:t>What You Already Run</a:t>
+            </a:r>
+            <a:endParaRPr lang="en-US" sz="2600" dirty="0"/>
           </a:p>
         </p:txBody>
       </p:sp>
@@ -6199,7 +6272,7 @@
                 <a:ea typeface="Arial" pitchFamily="34" charset="-122"/>
                 <a:cs typeface="Arial" pitchFamily="34" charset="-120"/>
               </a:rPr>
-              <a:t>When triage, routing, and reporting stop consuming staff hours, the same headcount and the same dollars shift from paperwork toward repair capacity.</a:t>
+              <a:t>CITIXEN UX is designed as an integration layer, not a replacement — council-facing records and back-office systems stay where they are.</a:t>
             </a:r>
             <a:endParaRPr lang="en-US" sz="1400" dirty="0"/>
           </a:p>
@@ -6213,77 +6286,16 @@
         </p:nvSpPr>
         <p:spPr>
           <a:xfrm>
-            <a:off x="548640" y="3017520"/>
-            <a:ext cx="6880945" cy="777240"/>
+            <a:off x="548640" y="2514600"/>
+            <a:ext cx="5408676" cy="2651760"/>
           </a:xfrm>
           <a:prstGeom prst="roundRect">
             <a:avLst>
-              <a:gd name="adj" fmla="val 7059"/>
+              <a:gd name="adj" fmla="val 4138"/>
             </a:avLst>
           </a:prstGeom>
           <a:solidFill>
-            <a:srgbClr val="00FF88"/>
-          </a:solidFill>
-          <a:ln/>
-        </p:spPr>
-      </p:sp>
-      <p:sp>
-        <p:nvSpPr>
-          <p:cNvPr id="7" name="Text 5"/>
-          <p:cNvSpPr txBox="1"/>
-          <p:nvPr/>
-        </p:nvSpPr>
-        <p:spPr>
-          <a:xfrm>
-            <a:off x="548640" y="3017520"/>
-            <a:ext cx="6880945" cy="777240"/>
-          </a:xfrm>
-          <a:prstGeom prst="rect">
-            <a:avLst/>
-          </a:prstGeom>
-          <a:noFill/>
-          <a:ln/>
-        </p:spPr>
-        <p:txBody>
-          <a:bodyPr wrap="square" lIns="0" tIns="0" rIns="0" bIns="0" rtlCol="0" anchor="ctr"/>
-          <a:lstStyle/>
-          <a:p>
-            <a:pPr algn="ctr" indent="0" marL="0">
-              <a:buNone/>
-            </a:pPr>
-            <a:r>
-              <a:rPr lang="en-US" sz="1300" b="1" dirty="0">
-                <a:solidFill>
-                  <a:srgbClr val="051311"/>
-                </a:solidFill>
-                <a:latin typeface="Arial" pitchFamily="34" charset="0"/>
-                <a:ea typeface="Arial" pitchFamily="34" charset="-122"/>
-                <a:cs typeface="Arial" pitchFamily="34" charset="-120"/>
-              </a:rPr>
-              <a:t>+34% FIELD EXECUTION</a:t>
-            </a:r>
-            <a:endParaRPr lang="en-US" sz="1300" dirty="0"/>
-          </a:p>
-        </p:txBody>
-      </p:sp>
-      <p:sp>
-        <p:nvSpPr>
-          <p:cNvPr id="8" name="Shape 6"/>
-          <p:cNvSpPr/>
-          <p:nvPr/>
-        </p:nvSpPr>
-        <p:spPr>
-          <a:xfrm>
-            <a:off x="7429585" y="3017520"/>
-            <a:ext cx="4210727" cy="777240"/>
-          </a:xfrm>
-          <a:prstGeom prst="roundRect">
-            <a:avLst>
-              <a:gd name="adj" fmla="val 7059"/>
-            </a:avLst>
-          </a:prstGeom>
-          <a:solidFill>
-            <a:srgbClr val="17201B"/>
+            <a:srgbClr val="0F1713"/>
           </a:solidFill>
           <a:ln w="12700">
             <a:solidFill>
@@ -6295,40 +6307,105 @@
       </p:sp>
       <p:sp>
         <p:nvSpPr>
+          <p:cNvPr id="7" name="Shape 5"/>
+          <p:cNvSpPr/>
+          <p:nvPr/>
+        </p:nvSpPr>
+        <p:spPr>
+          <a:xfrm>
+            <a:off x="822960" y="2743200"/>
+            <a:ext cx="1298448" cy="256032"/>
+          </a:xfrm>
+          <a:prstGeom prst="roundRect">
+            <a:avLst>
+              <a:gd name="adj" fmla="val 50000"/>
+            </a:avLst>
+          </a:prstGeom>
+          <a:ln w="12700">
+            <a:solidFill>
+              <a:srgbClr val="00FF88">
+                <a:alpha val="70000"/>
+              </a:srgbClr>
+            </a:solidFill>
+            <a:prstDash val="solid"/>
+          </a:ln>
+        </p:spPr>
+      </p:sp>
+      <p:sp>
+        <p:nvSpPr>
+          <p:cNvPr id="8" name="Text 6"/>
+          <p:cNvSpPr txBox="1"/>
+          <p:nvPr/>
+        </p:nvSpPr>
+        <p:spPr>
+          <a:xfrm>
+            <a:off x="822960" y="2743200"/>
+            <a:ext cx="1298448" cy="256032"/>
+          </a:xfrm>
+          <a:prstGeom prst="rect">
+            <a:avLst/>
+          </a:prstGeom>
+          <a:noFill/>
+          <a:ln/>
+        </p:spPr>
+        <p:txBody>
+          <a:bodyPr wrap="square" lIns="0" tIns="0" rIns="0" bIns="0" rtlCol="0" anchor="ctr"/>
+          <a:lstStyle/>
+          <a:p>
+            <a:pPr algn="ctr" indent="0" marL="0">
+              <a:buNone/>
+            </a:pPr>
+            <a:r>
+              <a:rPr lang="en-US" sz="900" b="1" spc="100" kern="0" dirty="0">
+                <a:solidFill>
+                  <a:srgbClr val="00FF88"/>
+                </a:solidFill>
+                <a:latin typeface="Courier New" pitchFamily="34" charset="0"/>
+                <a:ea typeface="Courier New" pitchFamily="34" charset="-122"/>
+                <a:cs typeface="Courier New" pitchFamily="34" charset="-120"/>
+              </a:rPr>
+              <a:t>AGENDA / RECORDS</a:t>
+            </a:r>
+            <a:endParaRPr lang="en-US" sz="900" dirty="0"/>
+          </a:p>
+        </p:txBody>
+      </p:sp>
+      <p:sp>
+        <p:nvSpPr>
           <p:cNvPr id="9" name="Text 7"/>
           <p:cNvSpPr txBox="1"/>
           <p:nvPr/>
         </p:nvSpPr>
         <p:spPr>
           <a:xfrm>
-            <a:off x="7429585" y="3017520"/>
-            <a:ext cx="4210727" cy="777240"/>
-          </a:xfrm>
-          <a:prstGeom prst="rect">
-            <a:avLst/>
-          </a:prstGeom>
-          <a:noFill/>
-          <a:ln/>
-        </p:spPr>
-        <p:txBody>
-          <a:bodyPr wrap="square" lIns="0" tIns="0" rIns="0" bIns="0" rtlCol="0" anchor="ctr"/>
-          <a:lstStyle/>
-          <a:p>
-            <a:pPr algn="ctr" indent="0" marL="0">
-              <a:buNone/>
-            </a:pPr>
-            <a:r>
-              <a:rPr lang="en-US" sz="1100" b="1" dirty="0">
-                <a:solidFill>
-                  <a:srgbClr val="8E9FA8"/>
+            <a:off x="822960" y="3108960"/>
+            <a:ext cx="4860036" cy="411480"/>
+          </a:xfrm>
+          <a:prstGeom prst="rect">
+            <a:avLst/>
+          </a:prstGeom>
+          <a:noFill/>
+          <a:ln/>
+        </p:spPr>
+        <p:txBody>
+          <a:bodyPr wrap="square" lIns="0" tIns="0" rIns="0" bIns="0" rtlCol="0" anchor="ctr"/>
+          <a:lstStyle/>
+          <a:p>
+            <a:pPr indent="0" marL="0">
+              <a:buNone/>
+            </a:pPr>
+            <a:r>
+              <a:rPr lang="en-US" sz="1500" b="1" dirty="0">
+                <a:solidFill>
+                  <a:srgbClr val="F8FAFC"/>
                 </a:solidFill>
                 <a:latin typeface="Arial" pitchFamily="34" charset="0"/>
                 <a:ea typeface="Arial" pitchFamily="34" charset="-122"/>
                 <a:cs typeface="Arial" pitchFamily="34" charset="-120"/>
               </a:rPr>
-              <a:t>−18% ADMIN OVERHEAD</a:t>
-            </a:r>
-            <a:endParaRPr lang="en-US" sz="1100" dirty="0"/>
+              <a:t>Legistar-Compatible Export</a:t>
+            </a:r>
+            <a:endParaRPr lang="en-US" sz="1500" dirty="0"/>
           </a:p>
         </p:txBody>
       </p:sp>
@@ -6340,8 +6417,8 @@
         </p:nvSpPr>
         <p:spPr>
           <a:xfrm>
-            <a:off x="548640" y="4023360"/>
-            <a:ext cx="3657600" cy="274320"/>
+            <a:off x="822960" y="3566160"/>
+            <a:ext cx="4860036" cy="1463040"/>
           </a:xfrm>
           <a:prstGeom prst="rect">
             <a:avLst/>
@@ -6354,10 +6431,105 @@
           <a:lstStyle/>
           <a:p>
             <a:pPr indent="0" marL="0">
-              <a:buNone/>
-            </a:pPr>
-            <a:r>
-              <a:rPr lang="en-US" sz="1000" dirty="0">
+              <a:lnSpc>
+                <a:spcPct val="135000"/>
+              </a:lnSpc>
+              <a:buNone/>
+            </a:pPr>
+            <a:r>
+              <a:rPr lang="en-US" sz="1200" dirty="0">
+                <a:solidFill>
+                  <a:srgbClr val="8E9FA8"/>
+                </a:solidFill>
+                <a:latin typeface="Arial" pitchFamily="34" charset="0"/>
+                <a:ea typeface="Arial" pitchFamily="34" charset="-122"/>
+                <a:cs typeface="Arial" pitchFamily="34" charset="-120"/>
+              </a:rPr>
+              <a:t>Ward reports and capital-ledger summaries export in a format built to attach directly to council agenda packets.</a:t>
+            </a:r>
+            <a:endParaRPr lang="en-US" sz="1200" dirty="0"/>
+          </a:p>
+        </p:txBody>
+      </p:sp>
+      <p:sp>
+        <p:nvSpPr>
+          <p:cNvPr id="11" name="Shape 9"/>
+          <p:cNvSpPr/>
+          <p:nvPr/>
+        </p:nvSpPr>
+        <p:spPr>
+          <a:xfrm>
+            <a:off x="6231636" y="2514600"/>
+            <a:ext cx="5408676" cy="2651760"/>
+          </a:xfrm>
+          <a:prstGeom prst="roundRect">
+            <a:avLst>
+              <a:gd name="adj" fmla="val 4138"/>
+            </a:avLst>
+          </a:prstGeom>
+          <a:solidFill>
+            <a:srgbClr val="0F1713"/>
+          </a:solidFill>
+          <a:ln w="12700">
+            <a:solidFill>
+              <a:srgbClr val="263029"/>
+            </a:solidFill>
+            <a:prstDash val="solid"/>
+          </a:ln>
+        </p:spPr>
+      </p:sp>
+      <p:sp>
+        <p:nvSpPr>
+          <p:cNvPr id="12" name="Shape 10"/>
+          <p:cNvSpPr/>
+          <p:nvPr/>
+        </p:nvSpPr>
+        <p:spPr>
+          <a:xfrm>
+            <a:off x="6505956" y="2743200"/>
+            <a:ext cx="955548" cy="256032"/>
+          </a:xfrm>
+          <a:prstGeom prst="roundRect">
+            <a:avLst>
+              <a:gd name="adj" fmla="val 50000"/>
+            </a:avLst>
+          </a:prstGeom>
+          <a:ln w="12700">
+            <a:solidFill>
+              <a:srgbClr val="00FF88">
+                <a:alpha val="70000"/>
+              </a:srgbClr>
+            </a:solidFill>
+            <a:prstDash val="solid"/>
+          </a:ln>
+        </p:spPr>
+      </p:sp>
+      <p:sp>
+        <p:nvSpPr>
+          <p:cNvPr id="13" name="Text 11"/>
+          <p:cNvSpPr txBox="1"/>
+          <p:nvPr/>
+        </p:nvSpPr>
+        <p:spPr>
+          <a:xfrm>
+            <a:off x="6505956" y="2743200"/>
+            <a:ext cx="955548" cy="256032"/>
+          </a:xfrm>
+          <a:prstGeom prst="rect">
+            <a:avLst/>
+          </a:prstGeom>
+          <a:noFill/>
+          <a:ln/>
+        </p:spPr>
+        <p:txBody>
+          <a:bodyPr wrap="square" lIns="0" tIns="0" rIns="0" bIns="0" rtlCol="0" anchor="ctr"/>
+          <a:lstStyle/>
+          <a:p>
+            <a:pPr algn="ctr" indent="0" marL="0">
+              <a:buNone/>
+            </a:pPr>
+            <a:r>
+              <a:rPr lang="en-US" sz="900" b="1" spc="100" kern="0" dirty="0">
                 <a:solidFill>
                   <a:srgbClr val="00FF88"/>
                 </a:solidFill>
@@ -6365,38 +6537,122 @@
                 <a:ea typeface="Courier New" pitchFamily="34" charset="-122"/>
                 <a:cs typeface="Courier New" pitchFamily="34" charset="-120"/>
               </a:rPr>
-              <a:t>■ FIELD REPAIR CAPITAL</a:t>
-            </a:r>
-            <a:endParaRPr lang="en-US" sz="1000" dirty="0"/>
-          </a:p>
-        </p:txBody>
-      </p:sp>
-      <p:sp>
-        <p:nvSpPr>
-          <p:cNvPr id="11" name="Text 9"/>
-          <p:cNvSpPr txBox="1"/>
-          <p:nvPr/>
-        </p:nvSpPr>
-        <p:spPr>
-          <a:xfrm>
-            <a:off x="7982712" y="4023360"/>
-            <a:ext cx="3657600" cy="274320"/>
-          </a:xfrm>
-          <a:prstGeom prst="rect">
-            <a:avLst/>
-          </a:prstGeom>
-          <a:noFill/>
-          <a:ln/>
-        </p:spPr>
-        <p:txBody>
-          <a:bodyPr wrap="square" lIns="0" tIns="0" rIns="0" bIns="0" rtlCol="0" anchor="ctr"/>
-          <a:lstStyle/>
-          <a:p>
-            <a:pPr algn="r" indent="0" marL="0">
-              <a:buNone/>
-            </a:pPr>
-            <a:r>
-              <a:rPr lang="en-US" sz="1000" dirty="0">
+              <a:t>BACK OFFICE</a:t>
+            </a:r>
+            <a:endParaRPr lang="en-US" sz="900" dirty="0"/>
+          </a:p>
+        </p:txBody>
+      </p:sp>
+      <p:sp>
+        <p:nvSpPr>
+          <p:cNvPr id="14" name="Text 12"/>
+          <p:cNvSpPr txBox="1"/>
+          <p:nvPr/>
+        </p:nvSpPr>
+        <p:spPr>
+          <a:xfrm>
+            <a:off x="6505956" y="3108960"/>
+            <a:ext cx="4860036" cy="411480"/>
+          </a:xfrm>
+          <a:prstGeom prst="rect">
+            <a:avLst/>
+          </a:prstGeom>
+          <a:noFill/>
+          <a:ln/>
+        </p:spPr>
+        <p:txBody>
+          <a:bodyPr wrap="square" lIns="0" tIns="0" rIns="0" bIns="0" rtlCol="0" anchor="ctr"/>
+          <a:lstStyle/>
+          <a:p>
+            <a:pPr indent="0" marL="0">
+              <a:buNone/>
+            </a:pPr>
+            <a:r>
+              <a:rPr lang="en-US" sz="1500" b="1" dirty="0">
+                <a:solidFill>
+                  <a:srgbClr val="F8FAFC"/>
+                </a:solidFill>
+                <a:latin typeface="Arial" pitchFamily="34" charset="0"/>
+                <a:ea typeface="Arial" pitchFamily="34" charset="-122"/>
+                <a:cs typeface="Arial" pitchFamily="34" charset="-120"/>
+              </a:rPr>
+              <a:t>Municipal ERP Integration Layer</a:t>
+            </a:r>
+            <a:endParaRPr lang="en-US" sz="1500" dirty="0"/>
+          </a:p>
+        </p:txBody>
+      </p:sp>
+      <p:sp>
+        <p:nvSpPr>
+          <p:cNvPr id="15" name="Text 13"/>
+          <p:cNvSpPr txBox="1"/>
+          <p:nvPr/>
+        </p:nvSpPr>
+        <p:spPr>
+          <a:xfrm>
+            <a:off x="6505956" y="3566160"/>
+            <a:ext cx="4860036" cy="1463040"/>
+          </a:xfrm>
+          <a:prstGeom prst="rect">
+            <a:avLst/>
+          </a:prstGeom>
+          <a:noFill/>
+          <a:ln/>
+        </p:spPr>
+        <p:txBody>
+          <a:bodyPr wrap="square" lIns="0" tIns="0" rIns="0" bIns="0" rtlCol="0" anchor="ctr"/>
+          <a:lstStyle/>
+          <a:p>
+            <a:pPr indent="0" marL="0">
+              <a:lnSpc>
+                <a:spcPct val="135000"/>
+              </a:lnSpc>
+              <a:buNone/>
+            </a:pPr>
+            <a:r>
+              <a:rPr lang="en-US" sz="1200" dirty="0">
+                <a:solidFill>
+                  <a:srgbClr val="8E9FA8"/>
+                </a:solidFill>
+                <a:latin typeface="Arial" pitchFamily="34" charset="0"/>
+                <a:ea typeface="Arial" pitchFamily="34" charset="-122"/>
+                <a:cs typeface="Arial" pitchFamily="34" charset="-120"/>
+              </a:rPr>
+              <a:t>Work-order and capital data sync outward via API — designed to complement existing asset-management and ERP systems, not replace them.</a:t>
+            </a:r>
+            <a:endParaRPr lang="en-US" sz="1200" dirty="0"/>
+          </a:p>
+        </p:txBody>
+      </p:sp>
+      <p:sp>
+        <p:nvSpPr>
+          <p:cNvPr id="16" name="Text 14"/>
+          <p:cNvSpPr txBox="1"/>
+          <p:nvPr/>
+        </p:nvSpPr>
+        <p:spPr>
+          <a:xfrm>
+            <a:off x="548640" y="5349240"/>
+            <a:ext cx="11091672" cy="457200"/>
+          </a:xfrm>
+          <a:prstGeom prst="rect">
+            <a:avLst/>
+          </a:prstGeom>
+          <a:noFill/>
+          <a:ln/>
+        </p:spPr>
+        <p:txBody>
+          <a:bodyPr wrap="square" lIns="0" tIns="0" rIns="0" bIns="0" rtlCol="0" anchor="ctr"/>
+          <a:lstStyle/>
+          <a:p>
+            <a:pPr indent="0" marL="0">
+              <a:lnSpc>
+                <a:spcPct val="130000"/>
+              </a:lnSpc>
+              <a:buNone/>
+            </a:pPr>
+            <a:r>
+              <a:rPr lang="en-US" sz="900" dirty="0">
                 <a:solidFill>
                   <a:srgbClr val="8E9FA8"/>
                 </a:solidFill>
@@ -6404,9 +6660,9 @@
                 <a:ea typeface="Courier New" pitchFamily="34" charset="-122"/>
                 <a:cs typeface="Courier New" pitchFamily="34" charset="-120"/>
               </a:rPr>
-              <a:t>■ ADMINISTRATIVE OVERHEAD</a:t>
-            </a:r>
-            <a:endParaRPr lang="en-US" sz="1000" dirty="0"/>
+              <a:t>Integration availability varies by municipal ERP vendor and Legistar deployment — confirm specific compatibility during technical scoping, not at contract signature.</a:t>
+            </a:r>
+            <a:endParaRPr lang="en-US" sz="900" dirty="0"/>
           </a:p>
         </p:txBody>
       </p:sp>
@@ -6468,7 +6724,7 @@
                 <a:ea typeface="Courier New" pitchFamily="34" charset="-122"/>
                 <a:cs typeface="Courier New" pitchFamily="34" charset="-120"/>
               </a:rPr>
-              <a:t>INTEGRATION</a:t>
+              <a:t>GOVERNANCE</a:t>
             </a:r>
             <a:endParaRPr lang="en-US" sz="1100" dirty="0"/>
           </a:p>
@@ -6546,7 +6802,7 @@
                 <a:ea typeface="Arial" pitchFamily="34" charset="-122"/>
                 <a:cs typeface="Arial" pitchFamily="34" charset="-120"/>
               </a:rPr>
-              <a:t>Built to Plug Into </a:t>
+              <a:t>Data Sovereignty &amp; </a:t>
             </a:r>
             <a:pPr indent="0" marL="0">
               <a:buNone/>
@@ -6560,7 +6816,7 @@
                 <a:ea typeface="Arial" pitchFamily="34" charset="-122"/>
                 <a:cs typeface="Arial" pitchFamily="34" charset="-120"/>
               </a:rPr>
-              <a:t>What You Already Run</a:t>
+              <a:t>2-Tier Retention</a:t>
             </a:r>
             <a:endParaRPr lang="en-US" sz="2600" dirty="0"/>
           </a:p>
@@ -6602,7 +6858,7 @@
                 <a:ea typeface="Arial" pitchFamily="34" charset="-122"/>
                 <a:cs typeface="Arial" pitchFamily="34" charset="-120"/>
               </a:rPr>
-              <a:t>CITIXEN UX is designed as an integration layer, not a replacement — council-facing records and back-office systems stay where they are.</a:t>
+              <a:t>The city owns its own tenant data outright. CITIXEN retains only anonymized, network-wide benchmarks — never a name, a device ID, or a precise location.</a:t>
             </a:r>
             <a:endParaRPr lang="en-US" sz="1400" dirty="0"/>
           </a:p>
@@ -6617,6 +6873,222 @@
         <p:spPr>
           <a:xfrm>
             <a:off x="548640" y="2514600"/>
+            <a:ext cx="5408676" cy="2651760"/>
+          </a:xfrm>
+          <a:prstGeom prst="roundRect">
+            <a:avLst>
+              <a:gd name="adj" fmla="val 4138"/>
+            </a:avLst>
+          </a:prstGeom>
+          <a:solidFill>
+            <a:srgbClr val="0F1713"/>
+          </a:solidFill>
+          <a:ln w="15875">
+            <a:solidFill>
+              <a:srgbClr val="00FF88"/>
+            </a:solidFill>
+            <a:prstDash val="solid"/>
+          </a:ln>
+        </p:spPr>
+      </p:sp>
+      <p:sp>
+        <p:nvSpPr>
+          <p:cNvPr id="7" name="Shape 5"/>
+          <p:cNvSpPr/>
+          <p:nvPr/>
+        </p:nvSpPr>
+        <p:spPr>
+          <a:xfrm>
+            <a:off x="822960" y="2743200"/>
+            <a:ext cx="2258568" cy="256032"/>
+          </a:xfrm>
+          <a:prstGeom prst="roundRect">
+            <a:avLst>
+              <a:gd name="adj" fmla="val 50000"/>
+            </a:avLst>
+          </a:prstGeom>
+          <a:ln w="12700">
+            <a:solidFill>
+              <a:srgbClr val="00FF88">
+                <a:alpha val="70000"/>
+              </a:srgbClr>
+            </a:solidFill>
+            <a:prstDash val="solid"/>
+          </a:ln>
+        </p:spPr>
+      </p:sp>
+      <p:sp>
+        <p:nvSpPr>
+          <p:cNvPr id="8" name="Text 6"/>
+          <p:cNvSpPr txBox="1"/>
+          <p:nvPr/>
+        </p:nvSpPr>
+        <p:spPr>
+          <a:xfrm>
+            <a:off x="822960" y="2743200"/>
+            <a:ext cx="2258568" cy="256032"/>
+          </a:xfrm>
+          <a:prstGeom prst="rect">
+            <a:avLst/>
+          </a:prstGeom>
+          <a:noFill/>
+          <a:ln/>
+        </p:spPr>
+        <p:txBody>
+          <a:bodyPr wrap="square" lIns="0" tIns="0" rIns="0" bIns="0" rtlCol="0" anchor="ctr"/>
+          <a:lstStyle/>
+          <a:p>
+            <a:pPr algn="ctr" indent="0" marL="0">
+              <a:buNone/>
+            </a:pPr>
+            <a:r>
+              <a:rPr lang="en-US" sz="900" b="1" spc="100" kern="0" dirty="0">
+                <a:solidFill>
+                  <a:srgbClr val="00FF88"/>
+                </a:solidFill>
+                <a:latin typeface="Courier New" pitchFamily="34" charset="0"/>
+                <a:ea typeface="Courier New" pitchFamily="34" charset="-122"/>
+                <a:cs typeface="Courier New" pitchFamily="34" charset="-120"/>
+              </a:rPr>
+              <a:t>TIER 1 · MUNICIPAL TENANT DATA</a:t>
+            </a:r>
+            <a:endParaRPr lang="en-US" sz="900" dirty="0"/>
+          </a:p>
+        </p:txBody>
+      </p:sp>
+      <p:sp>
+        <p:nvSpPr>
+          <p:cNvPr id="9" name="Text 7"/>
+          <p:cNvSpPr txBox="1"/>
+          <p:nvPr/>
+        </p:nvSpPr>
+        <p:spPr>
+          <a:xfrm>
+            <a:off x="822960" y="3108960"/>
+            <a:ext cx="4860036" cy="411480"/>
+          </a:xfrm>
+          <a:prstGeom prst="rect">
+            <a:avLst/>
+          </a:prstGeom>
+          <a:noFill/>
+          <a:ln/>
+        </p:spPr>
+        <p:txBody>
+          <a:bodyPr wrap="square" lIns="0" tIns="0" rIns="0" bIns="0" rtlCol="0" anchor="ctr"/>
+          <a:lstStyle/>
+          <a:p>
+            <a:pPr indent="0" marL="0">
+              <a:buNone/>
+            </a:pPr>
+            <a:r>
+              <a:rPr lang="en-US" sz="1500" b="1" dirty="0">
+                <a:solidFill>
+                  <a:srgbClr val="F8FAFC"/>
+                </a:solidFill>
+                <a:latin typeface="Arial" pitchFamily="34" charset="0"/>
+                <a:ea typeface="Arial" pitchFamily="34" charset="-122"/>
+                <a:cs typeface="Arial" pitchFamily="34" charset="-120"/>
+              </a:rPr>
+              <a:t>Sovereign City Data</a:t>
+            </a:r>
+            <a:endParaRPr lang="en-US" sz="1500" dirty="0"/>
+          </a:p>
+        </p:txBody>
+      </p:sp>
+      <p:sp>
+        <p:nvSpPr>
+          <p:cNvPr id="10" name="Text 8"/>
+          <p:cNvSpPr txBox="1"/>
+          <p:nvPr/>
+        </p:nvSpPr>
+        <p:spPr>
+          <a:xfrm>
+            <a:off x="822960" y="3566160"/>
+            <a:ext cx="4860036" cy="1463040"/>
+          </a:xfrm>
+          <a:prstGeom prst="rect">
+            <a:avLst/>
+          </a:prstGeom>
+          <a:noFill/>
+          <a:ln/>
+        </p:spPr>
+        <p:txBody>
+          <a:bodyPr wrap="square" lIns="0" tIns="0" rIns="0" bIns="0" rtlCol="0" anchor="ctr"/>
+          <a:lstStyle/>
+          <a:p>
+            <a:pPr marL="342900" indent="-342900">
+              <a:spcAft>
+                <a:spcPts val="600"/>
+              </a:spcAft>
+              <a:buSzPct val="100000"/>
+              <a:buChar char="•"/>
+            </a:pPr>
+            <a:r>
+              <a:rPr lang="en-US" sz="1150" dirty="0">
+                <a:solidFill>
+                  <a:srgbClr val="8E9FA8"/>
+                </a:solidFill>
+                <a:latin typeface="Arial" pitchFamily="34" charset="0"/>
+                <a:ea typeface="Arial" pitchFamily="34" charset="-122"/>
+                <a:cs typeface="Arial" pitchFamily="34" charset="-120"/>
+              </a:rPr>
+              <a:t>Raw ticket, location, and dispatch records stay inside that city's own instance</a:t>
+            </a:r>
+            <a:endParaRPr lang="en-US" sz="1150" dirty="0"/>
+          </a:p>
+          <a:p>
+            <a:pPr marL="342900" indent="-342900">
+              <a:spcAft>
+                <a:spcPts val="600"/>
+              </a:spcAft>
+              <a:buSzPct val="100000"/>
+              <a:buChar char="•"/>
+            </a:pPr>
+            <a:r>
+              <a:rPr lang="en-US" sz="1150" dirty="0">
+                <a:solidFill>
+                  <a:srgbClr val="8E9FA8"/>
+                </a:solidFill>
+                <a:latin typeface="Arial" pitchFamily="34" charset="0"/>
+                <a:ea typeface="Arial" pitchFamily="34" charset="-122"/>
+                <a:cs typeface="Arial" pitchFamily="34" charset="-120"/>
+              </a:rPr>
+              <a:t>Never sold or shared outside the municipal services agreement</a:t>
+            </a:r>
+            <a:endParaRPr lang="en-US" sz="1150" dirty="0"/>
+          </a:p>
+          <a:p>
+            <a:pPr marL="342900" indent="-342900">
+              <a:spcAft>
+                <a:spcPts val="600"/>
+              </a:spcAft>
+              <a:buSzPct val="100000"/>
+              <a:buChar char="•"/>
+            </a:pPr>
+            <a:r>
+              <a:rPr lang="en-US" sz="1150" dirty="0">
+                <a:solidFill>
+                  <a:srgbClr val="8E9FA8"/>
+                </a:solidFill>
+                <a:latin typeface="Arial" pitchFamily="34" charset="0"/>
+                <a:ea typeface="Arial" pitchFamily="34" charset="-122"/>
+                <a:cs typeface="Arial" pitchFamily="34" charset="-120"/>
+              </a:rPr>
+              <a:t>No resident accounts, logins, or device fingerprinting to begin with</a:t>
+            </a:r>
+            <a:endParaRPr lang="en-US" sz="1150" dirty="0"/>
+          </a:p>
+        </p:txBody>
+      </p:sp>
+      <p:sp>
+        <p:nvSpPr>
+          <p:cNvPr id="11" name="Shape 9"/>
+          <p:cNvSpPr/>
+          <p:nvPr/>
+        </p:nvSpPr>
+        <p:spPr>
+          <a:xfrm>
+            <a:off x="6231636" y="2514600"/>
             <a:ext cx="5408676" cy="2651760"/>
           </a:xfrm>
           <a:prstGeom prst="roundRect">
@@ -6637,14 +7109,14 @@
       </p:sp>
       <p:sp>
         <p:nvSpPr>
-          <p:cNvPr id="7" name="Shape 5"/>
+          <p:cNvPr id="12" name="Shape 10"/>
           <p:cNvSpPr/>
           <p:nvPr/>
         </p:nvSpPr>
         <p:spPr>
           <a:xfrm>
-            <a:off x="822960" y="2743200"/>
-            <a:ext cx="1298448" cy="256032"/>
+            <a:off x="6505956" y="2743200"/>
+            <a:ext cx="2327148" cy="256032"/>
           </a:xfrm>
           <a:prstGeom prst="roundRect">
             <a:avLst>
@@ -6663,14 +7135,14 @@
       </p:sp>
       <p:sp>
         <p:nvSpPr>
-          <p:cNvPr id="8" name="Text 6"/>
-          <p:cNvSpPr txBox="1"/>
-          <p:nvPr/>
-        </p:nvSpPr>
-        <p:spPr>
-          <a:xfrm>
-            <a:off x="822960" y="2743200"/>
-            <a:ext cx="1298448" cy="256032"/>
+          <p:cNvPr id="13" name="Text 11"/>
+          <p:cNvSpPr txBox="1"/>
+          <p:nvPr/>
+        </p:nvSpPr>
+        <p:spPr>
+          <a:xfrm>
+            <a:off x="6505956" y="2743200"/>
+            <a:ext cx="2327148" cy="256032"/>
           </a:xfrm>
           <a:prstGeom prst="rect">
             <a:avLst/>
@@ -6694,7 +7166,7 @@
                 <a:ea typeface="Courier New" pitchFamily="34" charset="-122"/>
                 <a:cs typeface="Courier New" pitchFamily="34" charset="-120"/>
               </a:rPr>
-              <a:t>AGENDA / RECORDS</a:t>
+              <a:t>TIER 2 · ANON. MACRO BENCHMARKS</a:t>
             </a:r>
             <a:endParaRPr lang="en-US" sz="900" dirty="0"/>
           </a:p>
@@ -6702,13 +7174,13 @@
       </p:sp>
       <p:sp>
         <p:nvSpPr>
-          <p:cNvPr id="9" name="Text 7"/>
-          <p:cNvSpPr txBox="1"/>
-          <p:nvPr/>
-        </p:nvSpPr>
-        <p:spPr>
-          <a:xfrm>
-            <a:off x="822960" y="3108960"/>
+          <p:cNvPr id="14" name="Text 12"/>
+          <p:cNvSpPr txBox="1"/>
+          <p:nvPr/>
+        </p:nvSpPr>
+        <p:spPr>
+          <a:xfrm>
+            <a:off x="6505956" y="3108960"/>
             <a:ext cx="4860036" cy="411480"/>
           </a:xfrm>
           <a:prstGeom prst="rect">
@@ -6733,7 +7205,7 @@
                 <a:ea typeface="Arial" pitchFamily="34" charset="-122"/>
                 <a:cs typeface="Arial" pitchFamily="34" charset="-120"/>
               </a:rPr>
-              <a:t>Legistar-Compatible Export</a:t>
+              <a:t>Cross-City Benchmarking</a:t>
             </a:r>
             <a:endParaRPr lang="en-US" sz="1500" dirty="0"/>
           </a:p>
@@ -6741,13 +7213,13 @@
       </p:sp>
       <p:sp>
         <p:nvSpPr>
-          <p:cNvPr id="10" name="Text 8"/>
-          <p:cNvSpPr txBox="1"/>
-          <p:nvPr/>
-        </p:nvSpPr>
-        <p:spPr>
-          <a:xfrm>
-            <a:off x="822960" y="3566160"/>
+          <p:cNvPr id="15" name="Text 13"/>
+          <p:cNvSpPr txBox="1"/>
+          <p:nvPr/>
+        </p:nvSpPr>
+        <p:spPr>
+          <a:xfrm>
+            <a:off x="6505956" y="3566160"/>
             <a:ext cx="4860036" cy="1463040"/>
           </a:xfrm>
           <a:prstGeom prst="rect">
@@ -6760,14 +7232,15 @@
           <a:bodyPr wrap="square" lIns="0" tIns="0" rIns="0" bIns="0" rtlCol="0" anchor="ctr"/>
           <a:lstStyle/>
           <a:p>
-            <a:pPr indent="0" marL="0">
-              <a:lnSpc>
-                <a:spcPct val="135000"/>
-              </a:lnSpc>
-              <a:buNone/>
-            </a:pPr>
-            <a:r>
-              <a:rPr lang="en-US" sz="1200" dirty="0">
+            <a:pPr marL="342900" indent="-342900">
+              <a:spcAft>
+                <a:spcPts val="600"/>
+              </a:spcAft>
+              <a:buSzPct val="100000"/>
+              <a:buChar char="•"/>
+            </a:pPr>
+            <a:r>
+              <a:rPr lang="en-US" sz="1150" dirty="0">
                 <a:solidFill>
                   <a:srgbClr val="8E9FA8"/>
                 </a:solidFill>
@@ -6775,172 +7248,41 @@
                 <a:ea typeface="Arial" pitchFamily="34" charset="-122"/>
                 <a:cs typeface="Arial" pitchFamily="34" charset="-120"/>
               </a:rPr>
-              <a:t>Ward reports and capital-ledger summaries export in a format built to attach directly to council agenda packets.</a:t>
-            </a:r>
-            <a:endParaRPr lang="en-US" sz="1200" dirty="0"/>
-          </a:p>
-        </p:txBody>
-      </p:sp>
-      <p:sp>
-        <p:nvSpPr>
-          <p:cNvPr id="11" name="Shape 9"/>
-          <p:cNvSpPr/>
-          <p:nvPr/>
-        </p:nvSpPr>
-        <p:spPr>
-          <a:xfrm>
-            <a:off x="6231636" y="2514600"/>
-            <a:ext cx="5408676" cy="2651760"/>
-          </a:xfrm>
-          <a:prstGeom prst="roundRect">
-            <a:avLst>
-              <a:gd name="adj" fmla="val 4138"/>
-            </a:avLst>
-          </a:prstGeom>
-          <a:solidFill>
-            <a:srgbClr val="0F1713"/>
-          </a:solidFill>
-          <a:ln w="12700">
-            <a:solidFill>
-              <a:srgbClr val="263029"/>
-            </a:solidFill>
-            <a:prstDash val="solid"/>
-          </a:ln>
-        </p:spPr>
-      </p:sp>
-      <p:sp>
-        <p:nvSpPr>
-          <p:cNvPr id="12" name="Shape 10"/>
-          <p:cNvSpPr/>
-          <p:nvPr/>
-        </p:nvSpPr>
-        <p:spPr>
-          <a:xfrm>
-            <a:off x="6505956" y="2743200"/>
-            <a:ext cx="955548" cy="256032"/>
-          </a:xfrm>
-          <a:prstGeom prst="roundRect">
-            <a:avLst>
-              <a:gd name="adj" fmla="val 50000"/>
-            </a:avLst>
-          </a:prstGeom>
-          <a:ln w="12700">
-            <a:solidFill>
-              <a:srgbClr val="00FF88">
-                <a:alpha val="70000"/>
-              </a:srgbClr>
-            </a:solidFill>
-            <a:prstDash val="solid"/>
-          </a:ln>
-        </p:spPr>
-      </p:sp>
-      <p:sp>
-        <p:nvSpPr>
-          <p:cNvPr id="13" name="Text 11"/>
-          <p:cNvSpPr txBox="1"/>
-          <p:nvPr/>
-        </p:nvSpPr>
-        <p:spPr>
-          <a:xfrm>
-            <a:off x="6505956" y="2743200"/>
-            <a:ext cx="955548" cy="256032"/>
-          </a:xfrm>
-          <a:prstGeom prst="rect">
-            <a:avLst/>
-          </a:prstGeom>
-          <a:noFill/>
-          <a:ln/>
-        </p:spPr>
-        <p:txBody>
-          <a:bodyPr wrap="square" lIns="0" tIns="0" rIns="0" bIns="0" rtlCol="0" anchor="ctr"/>
-          <a:lstStyle/>
-          <a:p>
-            <a:pPr algn="ctr" indent="0" marL="0">
-              <a:buNone/>
-            </a:pPr>
-            <a:r>
-              <a:rPr lang="en-US" sz="900" b="1" spc="100" kern="0" dirty="0">
-                <a:solidFill>
-                  <a:srgbClr val="00FF88"/>
-                </a:solidFill>
-                <a:latin typeface="Courier New" pitchFamily="34" charset="0"/>
-                <a:ea typeface="Courier New" pitchFamily="34" charset="-122"/>
-                <a:cs typeface="Courier New" pitchFamily="34" charset="-120"/>
-              </a:rPr>
-              <a:t>BACK OFFICE</a:t>
-            </a:r>
-            <a:endParaRPr lang="en-US" sz="900" dirty="0"/>
-          </a:p>
-        </p:txBody>
-      </p:sp>
-      <p:sp>
-        <p:nvSpPr>
-          <p:cNvPr id="14" name="Text 12"/>
-          <p:cNvSpPr txBox="1"/>
-          <p:nvPr/>
-        </p:nvSpPr>
-        <p:spPr>
-          <a:xfrm>
-            <a:off x="6505956" y="3108960"/>
-            <a:ext cx="4860036" cy="411480"/>
-          </a:xfrm>
-          <a:prstGeom prst="rect">
-            <a:avLst/>
-          </a:prstGeom>
-          <a:noFill/>
-          <a:ln/>
-        </p:spPr>
-        <p:txBody>
-          <a:bodyPr wrap="square" lIns="0" tIns="0" rIns="0" bIns="0" rtlCol="0" anchor="ctr"/>
-          <a:lstStyle/>
-          <a:p>
-            <a:pPr indent="0" marL="0">
-              <a:buNone/>
-            </a:pPr>
-            <a:r>
-              <a:rPr lang="en-US" sz="1500" b="1" dirty="0">
-                <a:solidFill>
-                  <a:srgbClr val="F8FAFC"/>
+              <a:t>Only aggregate, de-identified network-wide stats — resolution SLA, grid coverage, capital-split ratios</a:t>
+            </a:r>
+            <a:endParaRPr lang="en-US" sz="1150" dirty="0"/>
+          </a:p>
+          <a:p>
+            <a:pPr marL="342900" indent="-342900">
+              <a:spcAft>
+                <a:spcPts val="600"/>
+              </a:spcAft>
+              <a:buSzPct val="100000"/>
+              <a:buChar char="•"/>
+            </a:pPr>
+            <a:r>
+              <a:rPr lang="en-US" sz="1150" dirty="0">
+                <a:solidFill>
+                  <a:srgbClr val="8E9FA8"/>
                 </a:solidFill>
                 <a:latin typeface="Arial" pitchFamily="34" charset="0"/>
                 <a:ea typeface="Arial" pitchFamily="34" charset="-122"/>
                 <a:cs typeface="Arial" pitchFamily="34" charset="-120"/>
               </a:rPr>
-              <a:t>Municipal ERP Integration Layer</a:t>
-            </a:r>
-            <a:endParaRPr lang="en-US" sz="1500" dirty="0"/>
-          </a:p>
-        </p:txBody>
-      </p:sp>
-      <p:sp>
-        <p:nvSpPr>
-          <p:cNvPr id="15" name="Text 13"/>
-          <p:cNvSpPr txBox="1"/>
-          <p:nvPr/>
-        </p:nvSpPr>
-        <p:spPr>
-          <a:xfrm>
-            <a:off x="6505956" y="3566160"/>
-            <a:ext cx="4860036" cy="1463040"/>
-          </a:xfrm>
-          <a:prstGeom prst="rect">
-            <a:avLst/>
-          </a:prstGeom>
-          <a:noFill/>
-          <a:ln/>
-        </p:spPr>
-        <p:txBody>
-          <a:bodyPr wrap="square" lIns="0" tIns="0" rIns="0" bIns="0" rtlCol="0" anchor="ctr"/>
-          <a:lstStyle/>
-          <a:p>
-            <a:pPr indent="0" marL="0">
-              <a:lnSpc>
-                <a:spcPct val="135000"/>
-              </a:lnSpc>
-              <a:buNone/>
-            </a:pPr>
-            <a:r>
-              <a:rPr lang="en-US" sz="1200" dirty="0">
+              <a:t>Public ledger pins are coordinate-fuzzed to ~110m before anything is ever displayed</a:t>
+            </a:r>
+            <a:endParaRPr lang="en-US" sz="1150" dirty="0"/>
+          </a:p>
+          <a:p>
+            <a:pPr marL="342900" indent="-342900">
+              <a:spcAft>
+                <a:spcPts val="600"/>
+              </a:spcAft>
+              <a:buSzPct val="100000"/>
+              <a:buChar char="•"/>
+            </a:pPr>
+            <a:r>
+              <a:rPr lang="en-US" sz="1150" dirty="0">
                 <a:solidFill>
                   <a:srgbClr val="8E9FA8"/>
                 </a:solidFill>
@@ -6948,9 +7290,9 @@
                 <a:ea typeface="Arial" pitchFamily="34" charset="-122"/>
                 <a:cs typeface="Arial" pitchFamily="34" charset="-120"/>
               </a:rPr>
-              <a:t>Work-order and capital data sync outward via API — designed to complement existing asset-management and ERP systems, not replace them.</a:t>
-            </a:r>
-            <a:endParaRPr lang="en-US" sz="1200" dirty="0"/>
+              <a:t>EXIF/GPS and device identifiers are stripped from every photo before it leaves the reporter's device</a:t>
+            </a:r>
+            <a:endParaRPr lang="en-US" sz="1150" dirty="0"/>
           </a:p>
         </p:txBody>
       </p:sp>
@@ -6990,7 +7332,7 @@
                 <a:ea typeface="Courier New" pitchFamily="34" charset="-122"/>
                 <a:cs typeface="Courier New" pitchFamily="34" charset="-120"/>
               </a:rPr>
-              <a:t>Integration availability varies by municipal ERP vendor and Legistar deployment — confirm specific compatibility during technical scoping, not at contract signature.</a:t>
+              <a:t>Specific data-processing terms, retention windows, and sub-processor disclosures are governed by the municipal services agreement — this slide summarizes the platform's default architecture, not a substitute for that agreement.</a:t>
             </a:r>
             <a:endParaRPr lang="en-US" sz="900" dirty="0"/>
           </a:p>
